--- a/data/CNN/step2.pptx
+++ b/data/CNN/step2.pptx
@@ -692,9 +692,32 @@
           </a:p>
         </p:txBody>
       </p:sp>
+      <p:pic>
+        <p:nvPicPr>
+          <p:cNvPr id="8" name="" descr=""/>
+          <p:cNvPicPr/>
+          <p:nvPr/>
+        </p:nvPicPr>
+        <p:blipFill>
+          <a:blip r:embed="rId1"/>
+          <a:stretch/>
+        </p:blipFill>
+        <p:spPr>
+          <a:xfrm>
+            <a:off x="4809960" y="-190440"/>
+            <a:ext cx="2571480" cy="2571480"/>
+          </a:xfrm>
+          <a:prstGeom prst="rect">
+            <a:avLst/>
+          </a:prstGeom>
+          <a:ln w="0">
+            <a:noFill/>
+          </a:ln>
+        </p:spPr>
+      </p:pic>
       <p:sp>
         <p:nvSpPr>
-          <p:cNvPr id="8" name=""/>
+          <p:cNvPr id="9" name=""/>
           <p:cNvSpPr/>
           <p:nvPr/>
         </p:nvSpPr>
@@ -752,7 +775,7 @@
       </p:sp>
       <p:sp>
         <p:nvSpPr>
-          <p:cNvPr id="9" name=""/>
+          <p:cNvPr id="10" name=""/>
           <p:cNvSpPr txBox="1"/>
           <p:nvPr/>
         </p:nvSpPr>
@@ -785,49 +808,6 @@
               <a:t>畳み込みニューラルネットワーク入門</a:t>
             </a:r>
             <a:endParaRPr b="0" lang="en-US" sz="3750" spc="-1" strike="noStrike">
-              <a:solidFill>
-                <a:srgbClr val="000000"/>
-              </a:solidFill>
-              <a:latin typeface="Times New Roman"/>
-            </a:endParaRPr>
-          </a:p>
-        </p:txBody>
-      </p:sp>
-      <p:sp>
-        <p:nvSpPr>
-          <p:cNvPr id="10" name=""/>
-          <p:cNvSpPr txBox="1"/>
-          <p:nvPr/>
-        </p:nvSpPr>
-        <p:spPr>
-          <a:xfrm>
-            <a:off x="5353200" y="4708800"/>
-            <a:ext cx="1600920" cy="331200"/>
-          </a:xfrm>
-          <a:prstGeom prst="rect">
-            <a:avLst/>
-          </a:prstGeom>
-          <a:noFill/>
-          <a:ln w="0">
-            <a:noFill/>
-          </a:ln>
-        </p:spPr>
-        <p:txBody>
-          <a:bodyPr wrap="none" lIns="0" rIns="0" tIns="0" bIns="0" anchor="t">
-            <a:noAutofit/>
-          </a:bodyPr>
-          <a:p>
-            <a:r>
-              <a:rPr b="0" lang="zh-CN" sz="1800" spc="-1" strike="noStrike">
-                <a:solidFill>
-                  <a:srgbClr val="ffffff"/>
-                </a:solidFill>
-                <a:latin typeface="NotoSansJP"/>
-                <a:ea typeface="NotoSansJP"/>
-              </a:rPr>
-              <a:t>理学部　化学科</a:t>
-            </a:r>
-            <a:endParaRPr b="0" lang="en-US" sz="1800" spc="-1" strike="noStrike">
               <a:solidFill>
                 <a:srgbClr val="000000"/>
               </a:solidFill>
@@ -844,8 +824,8 @@
         </p:nvSpPr>
         <p:spPr>
           <a:xfrm>
-            <a:off x="5438880" y="5285880"/>
-            <a:ext cx="1433160" cy="415080"/>
+            <a:off x="5353200" y="4708800"/>
+            <a:ext cx="1600920" cy="331200"/>
           </a:xfrm>
           <a:prstGeom prst="rect">
             <a:avLst/>
@@ -861,16 +841,16 @@
           </a:bodyPr>
           <a:p>
             <a:r>
-              <a:rPr b="0" lang="zh-CN" sz="2250" spc="-1" strike="noStrike">
+              <a:rPr b="0" lang="zh-CN" sz="1800" spc="-1" strike="noStrike">
                 <a:solidFill>
                   <a:srgbClr val="ffffff"/>
                 </a:solidFill>
                 <a:latin typeface="NotoSansJP"/>
                 <a:ea typeface="NotoSansJP"/>
               </a:rPr>
-              <a:t>知能　太郎</a:t>
-            </a:r>
-            <a:endParaRPr b="0" lang="en-US" sz="2250" spc="-1" strike="noStrike">
+              <a:t>理学部　化学科</a:t>
+            </a:r>
+            <a:endParaRPr b="0" lang="en-US" sz="1800" spc="-1" strike="noStrike">
               <a:solidFill>
                 <a:srgbClr val="000000"/>
               </a:solidFill>
@@ -882,6 +862,49 @@
       <p:sp>
         <p:nvSpPr>
           <p:cNvPr id="12" name=""/>
+          <p:cNvSpPr txBox="1"/>
+          <p:nvPr/>
+        </p:nvSpPr>
+        <p:spPr>
+          <a:xfrm>
+            <a:off x="5438880" y="5285880"/>
+            <a:ext cx="1433160" cy="415080"/>
+          </a:xfrm>
+          <a:prstGeom prst="rect">
+            <a:avLst/>
+          </a:prstGeom>
+          <a:noFill/>
+          <a:ln w="0">
+            <a:noFill/>
+          </a:ln>
+        </p:spPr>
+        <p:txBody>
+          <a:bodyPr wrap="none" lIns="0" rIns="0" tIns="0" bIns="0" anchor="t">
+            <a:noAutofit/>
+          </a:bodyPr>
+          <a:p>
+            <a:r>
+              <a:rPr b="0" lang="zh-CN" sz="2250" spc="-1" strike="noStrike">
+                <a:solidFill>
+                  <a:srgbClr val="ffffff"/>
+                </a:solidFill>
+                <a:latin typeface="NotoSansJP"/>
+                <a:ea typeface="NotoSansJP"/>
+              </a:rPr>
+              <a:t>知能　太郎</a:t>
+            </a:r>
+            <a:endParaRPr b="0" lang="en-US" sz="2250" spc="-1" strike="noStrike">
+              <a:solidFill>
+                <a:srgbClr val="000000"/>
+              </a:solidFill>
+              <a:latin typeface="Times New Roman"/>
+            </a:endParaRPr>
+          </a:p>
+        </p:txBody>
+      </p:sp>
+      <p:sp>
+        <p:nvSpPr>
+          <p:cNvPr id="13" name=""/>
           <p:cNvSpPr txBox="1"/>
           <p:nvPr/>
         </p:nvSpPr>
@@ -954,7 +977,7 @@
       </p:grpSpPr>
       <p:sp>
         <p:nvSpPr>
-          <p:cNvPr id="183" name=""/>
+          <p:cNvPr id="192" name=""/>
           <p:cNvSpPr/>
           <p:nvPr/>
         </p:nvSpPr>
@@ -1012,7 +1035,7 @@
       </p:sp>
       <p:sp>
         <p:nvSpPr>
-          <p:cNvPr id="184" name=""/>
+          <p:cNvPr id="193" name=""/>
           <p:cNvSpPr/>
           <p:nvPr/>
         </p:nvSpPr>
@@ -1070,7 +1093,7 @@
       </p:sp>
       <p:sp>
         <p:nvSpPr>
-          <p:cNvPr id="185" name=""/>
+          <p:cNvPr id="194" name=""/>
           <p:cNvSpPr/>
           <p:nvPr/>
         </p:nvSpPr>
@@ -1128,7 +1151,7 @@
       </p:sp>
       <p:sp>
         <p:nvSpPr>
-          <p:cNvPr id="186" name=""/>
+          <p:cNvPr id="195" name=""/>
           <p:cNvSpPr/>
           <p:nvPr/>
         </p:nvSpPr>
@@ -1344,9 +1367,32 @@
           </a:p>
         </p:txBody>
       </p:sp>
+      <p:pic>
+        <p:nvPicPr>
+          <p:cNvPr id="196" name="" descr=""/>
+          <p:cNvPicPr/>
+          <p:nvPr/>
+        </p:nvPicPr>
+        <p:blipFill>
+          <a:blip r:embed="rId1"/>
+          <a:stretch/>
+        </p:blipFill>
+        <p:spPr>
+          <a:xfrm>
+            <a:off x="10515600" y="38160"/>
+            <a:ext cx="1142640" cy="1142640"/>
+          </a:xfrm>
+          <a:prstGeom prst="rect">
+            <a:avLst/>
+          </a:prstGeom>
+          <a:ln w="0">
+            <a:noFill/>
+          </a:ln>
+        </p:spPr>
+      </p:pic>
       <p:sp>
         <p:nvSpPr>
-          <p:cNvPr id="187" name=""/>
+          <p:cNvPr id="197" name=""/>
           <p:cNvSpPr txBox="1"/>
           <p:nvPr/>
         </p:nvSpPr>
@@ -1409,7 +1455,7 @@
       </p:sp>
       <p:sp>
         <p:nvSpPr>
-          <p:cNvPr id="188" name=""/>
+          <p:cNvPr id="198" name=""/>
           <p:cNvSpPr/>
           <p:nvPr/>
         </p:nvSpPr>
@@ -1615,7 +1661,7 @@
       </p:sp>
       <p:sp>
         <p:nvSpPr>
-          <p:cNvPr id="189" name=""/>
+          <p:cNvPr id="199" name=""/>
           <p:cNvSpPr txBox="1"/>
           <p:nvPr/>
         </p:nvSpPr>
@@ -1698,7 +1744,7 @@
       </p:sp>
       <p:sp>
         <p:nvSpPr>
-          <p:cNvPr id="190" name=""/>
+          <p:cNvPr id="200" name=""/>
           <p:cNvSpPr/>
           <p:nvPr/>
         </p:nvSpPr>
@@ -1904,7 +1950,7 @@
       </p:sp>
       <p:sp>
         <p:nvSpPr>
-          <p:cNvPr id="191" name=""/>
+          <p:cNvPr id="201" name=""/>
           <p:cNvSpPr txBox="1"/>
           <p:nvPr/>
         </p:nvSpPr>
@@ -1977,7 +2023,7 @@
       </p:sp>
       <p:sp>
         <p:nvSpPr>
-          <p:cNvPr id="192" name=""/>
+          <p:cNvPr id="202" name=""/>
           <p:cNvSpPr txBox="1"/>
           <p:nvPr/>
         </p:nvSpPr>
@@ -2040,7 +2086,7 @@
       </p:sp>
       <p:sp>
         <p:nvSpPr>
-          <p:cNvPr id="193" name=""/>
+          <p:cNvPr id="203" name=""/>
           <p:cNvSpPr/>
           <p:nvPr/>
         </p:nvSpPr>
@@ -2246,7 +2292,7 @@
       </p:sp>
       <p:sp>
         <p:nvSpPr>
-          <p:cNvPr id="194" name=""/>
+          <p:cNvPr id="204" name=""/>
           <p:cNvSpPr txBox="1"/>
           <p:nvPr/>
         </p:nvSpPr>
@@ -2289,7 +2335,7 @@
       </p:sp>
       <p:sp>
         <p:nvSpPr>
-          <p:cNvPr id="195" name=""/>
+          <p:cNvPr id="205" name=""/>
           <p:cNvSpPr txBox="1"/>
           <p:nvPr/>
         </p:nvSpPr>
@@ -2332,7 +2378,7 @@
       </p:sp>
       <p:sp>
         <p:nvSpPr>
-          <p:cNvPr id="196" name=""/>
+          <p:cNvPr id="206" name=""/>
           <p:cNvSpPr txBox="1"/>
           <p:nvPr/>
         </p:nvSpPr>
@@ -2375,7 +2421,7 @@
       </p:sp>
       <p:sp>
         <p:nvSpPr>
-          <p:cNvPr id="197" name=""/>
+          <p:cNvPr id="207" name=""/>
           <p:cNvSpPr/>
           <p:nvPr/>
         </p:nvSpPr>
@@ -2513,7 +2559,7 @@
       </p:sp>
       <p:sp>
         <p:nvSpPr>
-          <p:cNvPr id="198" name=""/>
+          <p:cNvPr id="208" name=""/>
           <p:cNvSpPr txBox="1"/>
           <p:nvPr/>
         </p:nvSpPr>
@@ -2566,7 +2612,7 @@
       </p:sp>
       <p:sp>
         <p:nvSpPr>
-          <p:cNvPr id="199" name=""/>
+          <p:cNvPr id="209" name=""/>
           <p:cNvSpPr txBox="1"/>
           <p:nvPr/>
         </p:nvSpPr>
@@ -2639,7 +2685,7 @@
       </p:grpSpPr>
       <p:sp>
         <p:nvSpPr>
-          <p:cNvPr id="200" name=""/>
+          <p:cNvPr id="210" name=""/>
           <p:cNvSpPr/>
           <p:nvPr/>
         </p:nvSpPr>
@@ -2697,7 +2743,7 @@
       </p:sp>
       <p:sp>
         <p:nvSpPr>
-          <p:cNvPr id="201" name=""/>
+          <p:cNvPr id="211" name=""/>
           <p:cNvSpPr/>
           <p:nvPr/>
         </p:nvSpPr>
@@ -2755,7 +2801,7 @@
       </p:sp>
       <p:sp>
         <p:nvSpPr>
-          <p:cNvPr id="202" name=""/>
+          <p:cNvPr id="212" name=""/>
           <p:cNvSpPr/>
           <p:nvPr/>
         </p:nvSpPr>
@@ -2813,7 +2859,7 @@
       </p:sp>
       <p:sp>
         <p:nvSpPr>
-          <p:cNvPr id="203" name=""/>
+          <p:cNvPr id="213" name=""/>
           <p:cNvSpPr/>
           <p:nvPr/>
         </p:nvSpPr>
@@ -3029,9 +3075,32 @@
           </a:p>
         </p:txBody>
       </p:sp>
+      <p:pic>
+        <p:nvPicPr>
+          <p:cNvPr id="214" name="" descr=""/>
+          <p:cNvPicPr/>
+          <p:nvPr/>
+        </p:nvPicPr>
+        <p:blipFill>
+          <a:blip r:embed="rId1"/>
+          <a:stretch/>
+        </p:blipFill>
+        <p:spPr>
+          <a:xfrm>
+            <a:off x="10515600" y="38160"/>
+            <a:ext cx="1142640" cy="1142640"/>
+          </a:xfrm>
+          <a:prstGeom prst="rect">
+            <a:avLst/>
+          </a:prstGeom>
+          <a:ln w="0">
+            <a:noFill/>
+          </a:ln>
+        </p:spPr>
+      </p:pic>
       <p:sp>
         <p:nvSpPr>
-          <p:cNvPr id="204" name=""/>
+          <p:cNvPr id="215" name=""/>
           <p:cNvSpPr/>
           <p:nvPr/>
         </p:nvSpPr>
@@ -3237,7 +3306,7 @@
       </p:sp>
       <p:sp>
         <p:nvSpPr>
-          <p:cNvPr id="205" name=""/>
+          <p:cNvPr id="216" name=""/>
           <p:cNvSpPr txBox="1"/>
           <p:nvPr/>
         </p:nvSpPr>
@@ -3300,7 +3369,7 @@
       </p:sp>
       <p:sp>
         <p:nvSpPr>
-          <p:cNvPr id="206" name=""/>
+          <p:cNvPr id="217" name=""/>
           <p:cNvSpPr/>
           <p:nvPr/>
         </p:nvSpPr>
@@ -3507,7 +3576,7 @@
       </p:sp>
       <p:sp>
         <p:nvSpPr>
-          <p:cNvPr id="207" name=""/>
+          <p:cNvPr id="218" name=""/>
           <p:cNvSpPr txBox="1"/>
           <p:nvPr/>
         </p:nvSpPr>
@@ -3550,7 +3619,7 @@
       </p:sp>
       <p:sp>
         <p:nvSpPr>
-          <p:cNvPr id="208" name=""/>
+          <p:cNvPr id="219" name=""/>
           <p:cNvSpPr/>
           <p:nvPr/>
         </p:nvSpPr>
@@ -3756,7 +3825,7 @@
       </p:sp>
       <p:sp>
         <p:nvSpPr>
-          <p:cNvPr id="209" name=""/>
+          <p:cNvPr id="220" name=""/>
           <p:cNvSpPr txBox="1"/>
           <p:nvPr/>
         </p:nvSpPr>
@@ -3799,7 +3868,7 @@
       </p:sp>
       <p:sp>
         <p:nvSpPr>
-          <p:cNvPr id="210" name=""/>
+          <p:cNvPr id="221" name=""/>
           <p:cNvSpPr/>
           <p:nvPr/>
         </p:nvSpPr>
@@ -4006,7 +4075,7 @@
       </p:sp>
       <p:sp>
         <p:nvSpPr>
-          <p:cNvPr id="211" name=""/>
+          <p:cNvPr id="222" name=""/>
           <p:cNvSpPr txBox="1"/>
           <p:nvPr/>
         </p:nvSpPr>
@@ -4049,7 +4118,7 @@
       </p:sp>
       <p:sp>
         <p:nvSpPr>
-          <p:cNvPr id="212" name=""/>
+          <p:cNvPr id="223" name=""/>
           <p:cNvSpPr/>
           <p:nvPr/>
         </p:nvSpPr>
@@ -4256,7 +4325,7 @@
       </p:sp>
       <p:sp>
         <p:nvSpPr>
-          <p:cNvPr id="213" name=""/>
+          <p:cNvPr id="224" name=""/>
           <p:cNvSpPr txBox="1"/>
           <p:nvPr/>
         </p:nvSpPr>
@@ -4299,7 +4368,7 @@
       </p:sp>
       <p:sp>
         <p:nvSpPr>
-          <p:cNvPr id="214" name=""/>
+          <p:cNvPr id="225" name=""/>
           <p:cNvSpPr/>
           <p:nvPr/>
         </p:nvSpPr>
@@ -4506,7 +4575,7 @@
       </p:sp>
       <p:sp>
         <p:nvSpPr>
-          <p:cNvPr id="215" name=""/>
+          <p:cNvPr id="226" name=""/>
           <p:cNvSpPr txBox="1"/>
           <p:nvPr/>
         </p:nvSpPr>
@@ -4549,7 +4618,7 @@
       </p:sp>
       <p:sp>
         <p:nvSpPr>
-          <p:cNvPr id="216" name=""/>
+          <p:cNvPr id="227" name=""/>
           <p:cNvSpPr/>
           <p:nvPr/>
         </p:nvSpPr>
@@ -4755,7 +4824,7 @@
       </p:sp>
       <p:sp>
         <p:nvSpPr>
-          <p:cNvPr id="217" name=""/>
+          <p:cNvPr id="228" name=""/>
           <p:cNvSpPr txBox="1"/>
           <p:nvPr/>
         </p:nvSpPr>
@@ -4858,7 +4927,7 @@
       </p:sp>
       <p:sp>
         <p:nvSpPr>
-          <p:cNvPr id="218" name=""/>
+          <p:cNvPr id="229" name=""/>
           <p:cNvSpPr/>
           <p:nvPr/>
         </p:nvSpPr>
@@ -5065,7 +5134,7 @@
       </p:sp>
       <p:sp>
         <p:nvSpPr>
-          <p:cNvPr id="219" name=""/>
+          <p:cNvPr id="230" name=""/>
           <p:cNvSpPr txBox="1"/>
           <p:nvPr/>
         </p:nvSpPr>
@@ -5108,7 +5177,7 @@
       </p:sp>
       <p:sp>
         <p:nvSpPr>
-          <p:cNvPr id="220" name=""/>
+          <p:cNvPr id="231" name=""/>
           <p:cNvSpPr/>
           <p:nvPr/>
         </p:nvSpPr>
@@ -5315,7 +5384,7 @@
       </p:sp>
       <p:sp>
         <p:nvSpPr>
-          <p:cNvPr id="221" name=""/>
+          <p:cNvPr id="232" name=""/>
           <p:cNvSpPr txBox="1"/>
           <p:nvPr/>
         </p:nvSpPr>
@@ -5378,7 +5447,7 @@
       </p:sp>
       <p:sp>
         <p:nvSpPr>
-          <p:cNvPr id="222" name=""/>
+          <p:cNvPr id="233" name=""/>
           <p:cNvSpPr txBox="1"/>
           <p:nvPr/>
         </p:nvSpPr>
@@ -5461,7 +5530,7 @@
       </p:sp>
       <p:sp>
         <p:nvSpPr>
-          <p:cNvPr id="223" name=""/>
+          <p:cNvPr id="234" name=""/>
           <p:cNvSpPr/>
           <p:nvPr/>
         </p:nvSpPr>
@@ -5599,7 +5668,7 @@
       </p:sp>
       <p:sp>
         <p:nvSpPr>
-          <p:cNvPr id="224" name=""/>
+          <p:cNvPr id="235" name=""/>
           <p:cNvSpPr txBox="1"/>
           <p:nvPr/>
         </p:nvSpPr>
@@ -5652,7 +5721,7 @@
       </p:sp>
       <p:sp>
         <p:nvSpPr>
-          <p:cNvPr id="225" name=""/>
+          <p:cNvPr id="236" name=""/>
           <p:cNvSpPr txBox="1"/>
           <p:nvPr/>
         </p:nvSpPr>
@@ -5725,7 +5794,7 @@
       </p:grpSpPr>
       <p:sp>
         <p:nvSpPr>
-          <p:cNvPr id="226" name=""/>
+          <p:cNvPr id="237" name=""/>
           <p:cNvSpPr/>
           <p:nvPr/>
         </p:nvSpPr>
@@ -5783,7 +5852,7 @@
       </p:sp>
       <p:sp>
         <p:nvSpPr>
-          <p:cNvPr id="227" name=""/>
+          <p:cNvPr id="238" name=""/>
           <p:cNvSpPr/>
           <p:nvPr/>
         </p:nvSpPr>
@@ -5841,7 +5910,7 @@
       </p:sp>
       <p:sp>
         <p:nvSpPr>
-          <p:cNvPr id="228" name=""/>
+          <p:cNvPr id="239" name=""/>
           <p:cNvSpPr/>
           <p:nvPr/>
         </p:nvSpPr>
@@ -5899,7 +5968,7 @@
       </p:sp>
       <p:sp>
         <p:nvSpPr>
-          <p:cNvPr id="229" name=""/>
+          <p:cNvPr id="240" name=""/>
           <p:cNvSpPr/>
           <p:nvPr/>
         </p:nvSpPr>
@@ -6115,9 +6184,32 @@
           </a:p>
         </p:txBody>
       </p:sp>
+      <p:pic>
+        <p:nvPicPr>
+          <p:cNvPr id="241" name="" descr=""/>
+          <p:cNvPicPr/>
+          <p:nvPr/>
+        </p:nvPicPr>
+        <p:blipFill>
+          <a:blip r:embed="rId1"/>
+          <a:stretch/>
+        </p:blipFill>
+        <p:spPr>
+          <a:xfrm>
+            <a:off x="10515600" y="38160"/>
+            <a:ext cx="1142640" cy="1142640"/>
+          </a:xfrm>
+          <a:prstGeom prst="rect">
+            <a:avLst/>
+          </a:prstGeom>
+          <a:ln w="0">
+            <a:noFill/>
+          </a:ln>
+        </p:spPr>
+      </p:pic>
       <p:sp>
         <p:nvSpPr>
-          <p:cNvPr id="230" name=""/>
+          <p:cNvPr id="242" name=""/>
           <p:cNvSpPr/>
           <p:nvPr/>
         </p:nvSpPr>
@@ -6323,7 +6415,7 @@
       </p:sp>
       <p:sp>
         <p:nvSpPr>
-          <p:cNvPr id="231" name=""/>
+          <p:cNvPr id="243" name=""/>
           <p:cNvSpPr txBox="1"/>
           <p:nvPr/>
         </p:nvSpPr>
@@ -6366,7 +6458,7 @@
       </p:sp>
       <p:sp>
         <p:nvSpPr>
-          <p:cNvPr id="232" name=""/>
+          <p:cNvPr id="244" name=""/>
           <p:cNvSpPr/>
           <p:nvPr/>
         </p:nvSpPr>
@@ -6573,7 +6665,7 @@
       </p:sp>
       <p:sp>
         <p:nvSpPr>
-          <p:cNvPr id="233" name=""/>
+          <p:cNvPr id="245" name=""/>
           <p:cNvSpPr txBox="1"/>
           <p:nvPr/>
         </p:nvSpPr>
@@ -6626,7 +6718,7 @@
       </p:sp>
       <p:sp>
         <p:nvSpPr>
-          <p:cNvPr id="234" name=""/>
+          <p:cNvPr id="246" name=""/>
           <p:cNvSpPr/>
           <p:nvPr/>
         </p:nvSpPr>
@@ -6832,7 +6924,7 @@
       </p:sp>
       <p:sp>
         <p:nvSpPr>
-          <p:cNvPr id="235" name=""/>
+          <p:cNvPr id="247" name=""/>
           <p:cNvSpPr txBox="1"/>
           <p:nvPr/>
         </p:nvSpPr>
@@ -6895,7 +6987,7 @@
       </p:sp>
       <p:sp>
         <p:nvSpPr>
-          <p:cNvPr id="236" name=""/>
+          <p:cNvPr id="248" name=""/>
           <p:cNvSpPr/>
           <p:nvPr/>
         </p:nvSpPr>
@@ -7102,7 +7194,7 @@
       </p:sp>
       <p:sp>
         <p:nvSpPr>
-          <p:cNvPr id="237" name=""/>
+          <p:cNvPr id="249" name=""/>
           <p:cNvSpPr txBox="1"/>
           <p:nvPr/>
         </p:nvSpPr>
@@ -7155,7 +7247,7 @@
       </p:sp>
       <p:sp>
         <p:nvSpPr>
-          <p:cNvPr id="238" name=""/>
+          <p:cNvPr id="250" name=""/>
           <p:cNvSpPr txBox="1"/>
           <p:nvPr/>
         </p:nvSpPr>
@@ -7198,7 +7290,7 @@
       </p:sp>
       <p:sp>
         <p:nvSpPr>
-          <p:cNvPr id="239" name=""/>
+          <p:cNvPr id="251" name=""/>
           <p:cNvSpPr/>
           <p:nvPr/>
         </p:nvSpPr>
@@ -7404,7 +7496,7 @@
       </p:sp>
       <p:sp>
         <p:nvSpPr>
-          <p:cNvPr id="240" name=""/>
+          <p:cNvPr id="252" name=""/>
           <p:cNvSpPr txBox="1"/>
           <p:nvPr/>
         </p:nvSpPr>
@@ -7447,7 +7539,7 @@
       </p:sp>
       <p:sp>
         <p:nvSpPr>
-          <p:cNvPr id="241" name=""/>
+          <p:cNvPr id="253" name=""/>
           <p:cNvSpPr/>
           <p:nvPr/>
         </p:nvSpPr>
@@ -7654,7 +7746,7 @@
       </p:sp>
       <p:sp>
         <p:nvSpPr>
-          <p:cNvPr id="242" name=""/>
+          <p:cNvPr id="254" name=""/>
           <p:cNvSpPr txBox="1"/>
           <p:nvPr/>
         </p:nvSpPr>
@@ -7697,7 +7789,7 @@
       </p:sp>
       <p:sp>
         <p:nvSpPr>
-          <p:cNvPr id="243" name=""/>
+          <p:cNvPr id="255" name=""/>
           <p:cNvSpPr txBox="1"/>
           <p:nvPr/>
         </p:nvSpPr>
@@ -7740,7 +7832,7 @@
       </p:sp>
       <p:sp>
         <p:nvSpPr>
-          <p:cNvPr id="244" name=""/>
+          <p:cNvPr id="256" name=""/>
           <p:cNvSpPr txBox="1"/>
           <p:nvPr/>
         </p:nvSpPr>
@@ -7803,7 +7895,7 @@
       </p:sp>
       <p:sp>
         <p:nvSpPr>
-          <p:cNvPr id="245" name=""/>
+          <p:cNvPr id="257" name=""/>
           <p:cNvSpPr/>
           <p:nvPr/>
         </p:nvSpPr>
@@ -7941,7 +8033,7 @@
       </p:sp>
       <p:sp>
         <p:nvSpPr>
-          <p:cNvPr id="246" name=""/>
+          <p:cNvPr id="258" name=""/>
           <p:cNvSpPr txBox="1"/>
           <p:nvPr/>
         </p:nvSpPr>
@@ -7994,7 +8086,7 @@
       </p:sp>
       <p:sp>
         <p:nvSpPr>
-          <p:cNvPr id="247" name=""/>
+          <p:cNvPr id="259" name=""/>
           <p:cNvSpPr txBox="1"/>
           <p:nvPr/>
         </p:nvSpPr>
@@ -8067,7 +8159,7 @@
       </p:grpSpPr>
       <p:sp>
         <p:nvSpPr>
-          <p:cNvPr id="13" name=""/>
+          <p:cNvPr id="14" name=""/>
           <p:cNvSpPr/>
           <p:nvPr/>
         </p:nvSpPr>
@@ -8125,7 +8217,7 @@
       </p:sp>
       <p:sp>
         <p:nvSpPr>
-          <p:cNvPr id="14" name=""/>
+          <p:cNvPr id="15" name=""/>
           <p:cNvSpPr/>
           <p:nvPr/>
         </p:nvSpPr>
@@ -8183,7 +8275,7 @@
       </p:sp>
       <p:sp>
         <p:nvSpPr>
-          <p:cNvPr id="15" name=""/>
+          <p:cNvPr id="16" name=""/>
           <p:cNvSpPr/>
           <p:nvPr/>
         </p:nvSpPr>
@@ -8241,7 +8333,7 @@
       </p:sp>
       <p:sp>
         <p:nvSpPr>
-          <p:cNvPr id="16" name=""/>
+          <p:cNvPr id="17" name=""/>
           <p:cNvSpPr txBox="1"/>
           <p:nvPr/>
         </p:nvSpPr>
@@ -8302,59 +8394,6 @@
                 <a:ea typeface="NotoSansJP"/>
               </a:rPr>
               <a:t>の課題</a:t>
-            </a:r>
-            <a:endParaRPr b="0" lang="en-US" sz="2400" spc="-1" strike="noStrike">
-              <a:solidFill>
-                <a:srgbClr val="000000"/>
-              </a:solidFill>
-              <a:latin typeface="Times New Roman"/>
-            </a:endParaRPr>
-          </a:p>
-        </p:txBody>
-      </p:sp>
-      <p:sp>
-        <p:nvSpPr>
-          <p:cNvPr id="17" name=""/>
-          <p:cNvSpPr txBox="1"/>
-          <p:nvPr/>
-        </p:nvSpPr>
-        <p:spPr>
-          <a:xfrm>
-            <a:off x="3009960" y="2436480"/>
-            <a:ext cx="1931040" cy="443880"/>
-          </a:xfrm>
-          <a:prstGeom prst="rect">
-            <a:avLst/>
-          </a:prstGeom>
-          <a:noFill/>
-          <a:ln w="0">
-            <a:noFill/>
-          </a:ln>
-        </p:spPr>
-        <p:txBody>
-          <a:bodyPr wrap="none" lIns="0" rIns="0" tIns="0" bIns="0" anchor="t">
-            <a:noAutofit/>
-          </a:bodyPr>
-          <a:p>
-            <a:r>
-              <a:rPr b="0" lang="en-US" sz="2400" spc="-1" strike="noStrike">
-                <a:solidFill>
-                  <a:srgbClr val="0b4b78"/>
-                </a:solidFill>
-                <a:latin typeface="NotoSansJP"/>
-                <a:ea typeface="NotoSansJP"/>
-              </a:rPr>
-              <a:t>2. CNN</a:t>
-            </a:r>
-            <a:r>
-              <a:rPr b="0" lang="zh-CN" sz="2400" spc="-1" strike="noStrike">
-                <a:solidFill>
-                  <a:srgbClr val="0b4b78"/>
-                </a:solidFill>
-                <a:latin typeface="NotoSansJP"/>
-                <a:ea typeface="NotoSansJP"/>
-              </a:rPr>
-              <a:t>とは？</a:t>
             </a:r>
             <a:endParaRPr b="0" lang="en-US" sz="2400" spc="-1" strike="noStrike">
               <a:solidFill>
@@ -8373,8 +8412,8 @@
         </p:nvSpPr>
         <p:spPr>
           <a:xfrm>
-            <a:off x="3009960" y="2893680"/>
-            <a:ext cx="2540520" cy="443880"/>
+            <a:off x="3009960" y="2436480"/>
+            <a:ext cx="1931040" cy="443880"/>
           </a:xfrm>
           <a:prstGeom prst="rect">
             <a:avLst/>
@@ -8397,7 +8436,7 @@
                 <a:latin typeface="NotoSansJP"/>
                 <a:ea typeface="NotoSansJP"/>
               </a:rPr>
-              <a:t>3. CNN</a:t>
+              <a:t>2. CNN</a:t>
             </a:r>
             <a:r>
               <a:rPr b="0" lang="zh-CN" sz="2400" spc="-1" strike="noStrike">
@@ -8407,7 +8446,7 @@
                 <a:latin typeface="NotoSansJP"/>
                 <a:ea typeface="NotoSansJP"/>
               </a:rPr>
-              <a:t>の基本構造</a:t>
+              <a:t>とは？</a:t>
             </a:r>
             <a:endParaRPr b="0" lang="en-US" sz="2400" spc="-1" strike="noStrike">
               <a:solidFill>
@@ -8426,8 +8465,8 @@
         </p:nvSpPr>
         <p:spPr>
           <a:xfrm>
-            <a:off x="3009960" y="3350880"/>
-            <a:ext cx="2537640" cy="443880"/>
+            <a:off x="3009960" y="2893680"/>
+            <a:ext cx="2540520" cy="443880"/>
           </a:xfrm>
           <a:prstGeom prst="rect">
             <a:avLst/>
@@ -8450,7 +8489,7 @@
                 <a:latin typeface="NotoSansJP"/>
                 <a:ea typeface="NotoSansJP"/>
               </a:rPr>
-              <a:t>4. </a:t>
+              <a:t>3. CNN</a:t>
             </a:r>
             <a:r>
               <a:rPr b="0" lang="zh-CN" sz="2400" spc="-1" strike="noStrike">
@@ -8460,7 +8499,7 @@
                 <a:latin typeface="NotoSansJP"/>
                 <a:ea typeface="NotoSansJP"/>
               </a:rPr>
-              <a:t>主要な層の役割</a:t>
+              <a:t>の基本構造</a:t>
             </a:r>
             <a:endParaRPr b="0" lang="en-US" sz="2400" spc="-1" strike="noStrike">
               <a:solidFill>
@@ -8479,8 +8518,8 @@
         </p:nvSpPr>
         <p:spPr>
           <a:xfrm>
-            <a:off x="3009960" y="3808080"/>
-            <a:ext cx="2845440" cy="443880"/>
+            <a:off x="3009960" y="3350880"/>
+            <a:ext cx="2537640" cy="443880"/>
           </a:xfrm>
           <a:prstGeom prst="rect">
             <a:avLst/>
@@ -8503,7 +8542,7 @@
                 <a:latin typeface="NotoSansJP"/>
                 <a:ea typeface="NotoSansJP"/>
               </a:rPr>
-              <a:t>5. CNN</a:t>
+              <a:t>4. </a:t>
             </a:r>
             <a:r>
               <a:rPr b="0" lang="zh-CN" sz="2400" spc="-1" strike="noStrike">
@@ -8513,7 +8552,7 @@
                 <a:latin typeface="NotoSansJP"/>
                 <a:ea typeface="NotoSansJP"/>
               </a:rPr>
-              <a:t>構築のレシピ</a:t>
+              <a:t>主要な層の役割</a:t>
             </a:r>
             <a:endParaRPr b="0" lang="en-US" sz="2400" spc="-1" strike="noStrike">
               <a:solidFill>
@@ -8532,8 +8571,8 @@
         </p:nvSpPr>
         <p:spPr>
           <a:xfrm>
-            <a:off x="3009960" y="4265280"/>
-            <a:ext cx="1318320" cy="443880"/>
+            <a:off x="3009960" y="3808080"/>
+            <a:ext cx="2845440" cy="443880"/>
           </a:xfrm>
           <a:prstGeom prst="rect">
             <a:avLst/>
@@ -8556,7 +8595,7 @@
                 <a:latin typeface="NotoSansJP"/>
                 <a:ea typeface="NotoSansJP"/>
               </a:rPr>
-              <a:t>6. </a:t>
+              <a:t>5. CNN</a:t>
             </a:r>
             <a:r>
               <a:rPr b="0" lang="zh-CN" sz="2400" spc="-1" strike="noStrike">
@@ -8566,7 +8605,7 @@
                 <a:latin typeface="NotoSansJP"/>
                 <a:ea typeface="NotoSansJP"/>
               </a:rPr>
-              <a:t>まとめ</a:t>
+              <a:t>構築のレシピ</a:t>
             </a:r>
             <a:endParaRPr b="0" lang="en-US" sz="2400" spc="-1" strike="noStrike">
               <a:solidFill>
@@ -8580,6 +8619,59 @@
       <p:sp>
         <p:nvSpPr>
           <p:cNvPr id="22" name=""/>
+          <p:cNvSpPr txBox="1"/>
+          <p:nvPr/>
+        </p:nvSpPr>
+        <p:spPr>
+          <a:xfrm>
+            <a:off x="3009960" y="4265280"/>
+            <a:ext cx="1318320" cy="443880"/>
+          </a:xfrm>
+          <a:prstGeom prst="rect">
+            <a:avLst/>
+          </a:prstGeom>
+          <a:noFill/>
+          <a:ln w="0">
+            <a:noFill/>
+          </a:ln>
+        </p:spPr>
+        <p:txBody>
+          <a:bodyPr wrap="none" lIns="0" rIns="0" tIns="0" bIns="0" anchor="t">
+            <a:noAutofit/>
+          </a:bodyPr>
+          <a:p>
+            <a:r>
+              <a:rPr b="0" lang="en-US" sz="2400" spc="-1" strike="noStrike">
+                <a:solidFill>
+                  <a:srgbClr val="0b4b78"/>
+                </a:solidFill>
+                <a:latin typeface="NotoSansJP"/>
+                <a:ea typeface="NotoSansJP"/>
+              </a:rPr>
+              <a:t>6. </a:t>
+            </a:r>
+            <a:r>
+              <a:rPr b="0" lang="zh-CN" sz="2400" spc="-1" strike="noStrike">
+                <a:solidFill>
+                  <a:srgbClr val="0b4b78"/>
+                </a:solidFill>
+                <a:latin typeface="NotoSansJP"/>
+                <a:ea typeface="NotoSansJP"/>
+              </a:rPr>
+              <a:t>まとめ</a:t>
+            </a:r>
+            <a:endParaRPr b="0" lang="en-US" sz="2400" spc="-1" strike="noStrike">
+              <a:solidFill>
+                <a:srgbClr val="000000"/>
+              </a:solidFill>
+              <a:latin typeface="Times New Roman"/>
+            </a:endParaRPr>
+          </a:p>
+        </p:txBody>
+      </p:sp>
+      <p:sp>
+        <p:nvSpPr>
+          <p:cNvPr id="23" name=""/>
           <p:cNvSpPr/>
           <p:nvPr/>
         </p:nvSpPr>
@@ -8635,9 +8727,32 @@
           </a:p>
         </p:txBody>
       </p:sp>
+      <p:pic>
+        <p:nvPicPr>
+          <p:cNvPr id="24" name="" descr=""/>
+          <p:cNvPicPr/>
+          <p:nvPr/>
+        </p:nvPicPr>
+        <p:blipFill>
+          <a:blip r:embed="rId1"/>
+          <a:stretch/>
+        </p:blipFill>
+        <p:spPr>
+          <a:xfrm>
+            <a:off x="10744200" y="-219240"/>
+            <a:ext cx="1256760" cy="1256760"/>
+          </a:xfrm>
+          <a:prstGeom prst="rect">
+            <a:avLst/>
+          </a:prstGeom>
+          <a:ln w="0">
+            <a:noFill/>
+          </a:ln>
+        </p:spPr>
+      </p:pic>
       <p:sp>
         <p:nvSpPr>
-          <p:cNvPr id="23" name=""/>
+          <p:cNvPr id="25" name=""/>
           <p:cNvSpPr/>
           <p:nvPr/>
         </p:nvSpPr>
@@ -8695,7 +8810,7 @@
       </p:sp>
       <p:sp>
         <p:nvSpPr>
-          <p:cNvPr id="24" name=""/>
+          <p:cNvPr id="26" name=""/>
           <p:cNvSpPr/>
           <p:nvPr/>
         </p:nvSpPr>
@@ -8753,7 +8868,7 @@
       </p:sp>
       <p:sp>
         <p:nvSpPr>
-          <p:cNvPr id="25" name=""/>
+          <p:cNvPr id="27" name=""/>
           <p:cNvSpPr/>
           <p:nvPr/>
         </p:nvSpPr>
@@ -8811,7 +8926,7 @@
       </p:sp>
       <p:sp>
         <p:nvSpPr>
-          <p:cNvPr id="26" name=""/>
+          <p:cNvPr id="28" name=""/>
           <p:cNvSpPr/>
           <p:nvPr/>
         </p:nvSpPr>
@@ -8869,7 +8984,7 @@
       </p:sp>
       <p:sp>
         <p:nvSpPr>
-          <p:cNvPr id="27" name=""/>
+          <p:cNvPr id="29" name=""/>
           <p:cNvSpPr/>
           <p:nvPr/>
         </p:nvSpPr>
@@ -8927,7 +9042,7 @@
       </p:sp>
       <p:sp>
         <p:nvSpPr>
-          <p:cNvPr id="28" name=""/>
+          <p:cNvPr id="30" name=""/>
           <p:cNvSpPr/>
           <p:nvPr/>
         </p:nvSpPr>
@@ -8985,7 +9100,7 @@
       </p:sp>
       <p:sp>
         <p:nvSpPr>
-          <p:cNvPr id="29" name=""/>
+          <p:cNvPr id="31" name=""/>
           <p:cNvSpPr txBox="1"/>
           <p:nvPr/>
         </p:nvSpPr>
@@ -9028,7 +9143,7 @@
       </p:sp>
       <p:sp>
         <p:nvSpPr>
-          <p:cNvPr id="30" name=""/>
+          <p:cNvPr id="32" name=""/>
           <p:cNvSpPr txBox="1"/>
           <p:nvPr/>
         </p:nvSpPr>
@@ -9101,7 +9216,7 @@
       </p:grpSpPr>
       <p:sp>
         <p:nvSpPr>
-          <p:cNvPr id="31" name=""/>
+          <p:cNvPr id="33" name=""/>
           <p:cNvSpPr/>
           <p:nvPr/>
         </p:nvSpPr>
@@ -9159,7 +9274,7 @@
       </p:sp>
       <p:sp>
         <p:nvSpPr>
-          <p:cNvPr id="32" name=""/>
+          <p:cNvPr id="34" name=""/>
           <p:cNvSpPr/>
           <p:nvPr/>
         </p:nvSpPr>
@@ -9217,7 +9332,7 @@
       </p:sp>
       <p:sp>
         <p:nvSpPr>
-          <p:cNvPr id="33" name=""/>
+          <p:cNvPr id="35" name=""/>
           <p:cNvSpPr/>
           <p:nvPr/>
         </p:nvSpPr>
@@ -9275,7 +9390,7 @@
       </p:sp>
       <p:sp>
         <p:nvSpPr>
-          <p:cNvPr id="34" name=""/>
+          <p:cNvPr id="36" name=""/>
           <p:cNvSpPr/>
           <p:nvPr/>
         </p:nvSpPr>
@@ -9491,9 +9606,32 @@
           </a:p>
         </p:txBody>
       </p:sp>
+      <p:pic>
+        <p:nvPicPr>
+          <p:cNvPr id="37" name="" descr=""/>
+          <p:cNvPicPr/>
+          <p:nvPr/>
+        </p:nvPicPr>
+        <p:blipFill>
+          <a:blip r:embed="rId1"/>
+          <a:stretch/>
+        </p:blipFill>
+        <p:spPr>
+          <a:xfrm>
+            <a:off x="10515600" y="38160"/>
+            <a:ext cx="1142640" cy="1142640"/>
+          </a:xfrm>
+          <a:prstGeom prst="rect">
+            <a:avLst/>
+          </a:prstGeom>
+          <a:ln w="0">
+            <a:noFill/>
+          </a:ln>
+        </p:spPr>
+      </p:pic>
       <p:sp>
         <p:nvSpPr>
-          <p:cNvPr id="35" name=""/>
+          <p:cNvPr id="38" name=""/>
           <p:cNvSpPr/>
           <p:nvPr/>
         </p:nvSpPr>
@@ -9699,7 +9837,7 @@
       </p:sp>
       <p:sp>
         <p:nvSpPr>
-          <p:cNvPr id="36" name=""/>
+          <p:cNvPr id="39" name=""/>
           <p:cNvSpPr txBox="1"/>
           <p:nvPr/>
         </p:nvSpPr>
@@ -9762,7 +9900,7 @@
       </p:sp>
       <p:sp>
         <p:nvSpPr>
-          <p:cNvPr id="37" name=""/>
+          <p:cNvPr id="40" name=""/>
           <p:cNvSpPr/>
           <p:nvPr/>
         </p:nvSpPr>
@@ -9969,7 +10107,7 @@
       </p:sp>
       <p:sp>
         <p:nvSpPr>
-          <p:cNvPr id="38" name=""/>
+          <p:cNvPr id="41" name=""/>
           <p:cNvSpPr txBox="1"/>
           <p:nvPr/>
         </p:nvSpPr>
@@ -10012,7 +10150,7 @@
       </p:sp>
       <p:sp>
         <p:nvSpPr>
-          <p:cNvPr id="39" name=""/>
+          <p:cNvPr id="42" name=""/>
           <p:cNvSpPr/>
           <p:nvPr/>
         </p:nvSpPr>
@@ -10219,7 +10357,7 @@
       </p:sp>
       <p:sp>
         <p:nvSpPr>
-          <p:cNvPr id="40" name=""/>
+          <p:cNvPr id="43" name=""/>
           <p:cNvSpPr txBox="1"/>
           <p:nvPr/>
         </p:nvSpPr>
@@ -10262,7 +10400,7 @@
       </p:sp>
       <p:sp>
         <p:nvSpPr>
-          <p:cNvPr id="41" name=""/>
+          <p:cNvPr id="44" name=""/>
           <p:cNvSpPr txBox="1"/>
           <p:nvPr/>
         </p:nvSpPr>
@@ -10365,7 +10503,7 @@
       </p:sp>
       <p:sp>
         <p:nvSpPr>
-          <p:cNvPr id="42" name=""/>
+          <p:cNvPr id="45" name=""/>
           <p:cNvSpPr/>
           <p:nvPr/>
         </p:nvSpPr>
@@ -10571,7 +10709,7 @@
       </p:sp>
       <p:sp>
         <p:nvSpPr>
-          <p:cNvPr id="43" name=""/>
+          <p:cNvPr id="46" name=""/>
           <p:cNvSpPr txBox="1"/>
           <p:nvPr/>
         </p:nvSpPr>
@@ -10624,7 +10762,7 @@
       </p:sp>
       <p:sp>
         <p:nvSpPr>
-          <p:cNvPr id="44" name=""/>
+          <p:cNvPr id="47" name=""/>
           <p:cNvSpPr/>
           <p:nvPr/>
         </p:nvSpPr>
@@ -10831,7 +10969,7 @@
       </p:sp>
       <p:sp>
         <p:nvSpPr>
-          <p:cNvPr id="45" name=""/>
+          <p:cNvPr id="48" name=""/>
           <p:cNvSpPr txBox="1"/>
           <p:nvPr/>
         </p:nvSpPr>
@@ -10884,7 +11022,7 @@
       </p:sp>
       <p:sp>
         <p:nvSpPr>
-          <p:cNvPr id="46" name=""/>
+          <p:cNvPr id="49" name=""/>
           <p:cNvSpPr/>
           <p:nvPr/>
         </p:nvSpPr>
@@ -11091,7 +11229,7 @@
       </p:sp>
       <p:sp>
         <p:nvSpPr>
-          <p:cNvPr id="47" name=""/>
+          <p:cNvPr id="50" name=""/>
           <p:cNvSpPr txBox="1"/>
           <p:nvPr/>
         </p:nvSpPr>
@@ -11134,7 +11272,7 @@
       </p:sp>
       <p:sp>
         <p:nvSpPr>
-          <p:cNvPr id="48" name=""/>
+          <p:cNvPr id="51" name=""/>
           <p:cNvSpPr txBox="1"/>
           <p:nvPr/>
         </p:nvSpPr>
@@ -11177,7 +11315,7 @@
       </p:sp>
       <p:sp>
         <p:nvSpPr>
-          <p:cNvPr id="49" name=""/>
+          <p:cNvPr id="52" name=""/>
           <p:cNvSpPr txBox="1"/>
           <p:nvPr/>
         </p:nvSpPr>
@@ -11230,7 +11368,7 @@
       </p:sp>
       <p:sp>
         <p:nvSpPr>
-          <p:cNvPr id="50" name=""/>
+          <p:cNvPr id="53" name=""/>
           <p:cNvSpPr/>
           <p:nvPr/>
         </p:nvSpPr>
@@ -11368,7 +11506,7 @@
       </p:sp>
       <p:sp>
         <p:nvSpPr>
-          <p:cNvPr id="51" name=""/>
+          <p:cNvPr id="54" name=""/>
           <p:cNvSpPr txBox="1"/>
           <p:nvPr/>
         </p:nvSpPr>
@@ -11441,7 +11579,7 @@
       </p:sp>
       <p:sp>
         <p:nvSpPr>
-          <p:cNvPr id="52" name=""/>
+          <p:cNvPr id="55" name=""/>
           <p:cNvSpPr txBox="1"/>
           <p:nvPr/>
         </p:nvSpPr>
@@ -11514,7 +11652,7 @@
       </p:grpSpPr>
       <p:sp>
         <p:nvSpPr>
-          <p:cNvPr id="53" name=""/>
+          <p:cNvPr id="56" name=""/>
           <p:cNvSpPr/>
           <p:nvPr/>
         </p:nvSpPr>
@@ -11572,7 +11710,7 @@
       </p:sp>
       <p:sp>
         <p:nvSpPr>
-          <p:cNvPr id="54" name=""/>
+          <p:cNvPr id="57" name=""/>
           <p:cNvSpPr/>
           <p:nvPr/>
         </p:nvSpPr>
@@ -11630,7 +11768,7 @@
       </p:sp>
       <p:sp>
         <p:nvSpPr>
-          <p:cNvPr id="55" name=""/>
+          <p:cNvPr id="58" name=""/>
           <p:cNvSpPr/>
           <p:nvPr/>
         </p:nvSpPr>
@@ -11688,7 +11826,7 @@
       </p:sp>
       <p:sp>
         <p:nvSpPr>
-          <p:cNvPr id="56" name=""/>
+          <p:cNvPr id="59" name=""/>
           <p:cNvSpPr/>
           <p:nvPr/>
         </p:nvSpPr>
@@ -11904,9 +12042,32 @@
           </a:p>
         </p:txBody>
       </p:sp>
+      <p:pic>
+        <p:nvPicPr>
+          <p:cNvPr id="60" name="" descr=""/>
+          <p:cNvPicPr/>
+          <p:nvPr/>
+        </p:nvPicPr>
+        <p:blipFill>
+          <a:blip r:embed="rId1"/>
+          <a:stretch/>
+        </p:blipFill>
+        <p:spPr>
+          <a:xfrm>
+            <a:off x="10515600" y="38160"/>
+            <a:ext cx="1142640" cy="1142640"/>
+          </a:xfrm>
+          <a:prstGeom prst="rect">
+            <a:avLst/>
+          </a:prstGeom>
+          <a:ln w="0">
+            <a:noFill/>
+          </a:ln>
+        </p:spPr>
+      </p:pic>
       <p:sp>
         <p:nvSpPr>
-          <p:cNvPr id="57" name=""/>
+          <p:cNvPr id="61" name=""/>
           <p:cNvSpPr/>
           <p:nvPr/>
         </p:nvSpPr>
@@ -12112,7 +12273,7 @@
       </p:sp>
       <p:sp>
         <p:nvSpPr>
-          <p:cNvPr id="58" name=""/>
+          <p:cNvPr id="62" name=""/>
           <p:cNvSpPr txBox="1"/>
           <p:nvPr/>
         </p:nvSpPr>
@@ -12185,7 +12346,7 @@
       </p:sp>
       <p:sp>
         <p:nvSpPr>
-          <p:cNvPr id="59" name=""/>
+          <p:cNvPr id="63" name=""/>
           <p:cNvSpPr/>
           <p:nvPr/>
         </p:nvSpPr>
@@ -12392,7 +12553,7 @@
       </p:sp>
       <p:sp>
         <p:nvSpPr>
-          <p:cNvPr id="60" name=""/>
+          <p:cNvPr id="64" name=""/>
           <p:cNvSpPr txBox="1"/>
           <p:nvPr/>
         </p:nvSpPr>
@@ -12435,7 +12596,7 @@
       </p:sp>
       <p:sp>
         <p:nvSpPr>
-          <p:cNvPr id="61" name=""/>
+          <p:cNvPr id="65" name=""/>
           <p:cNvSpPr/>
           <p:nvPr/>
         </p:nvSpPr>
@@ -12642,7 +12803,7 @@
       </p:sp>
       <p:sp>
         <p:nvSpPr>
-          <p:cNvPr id="62" name=""/>
+          <p:cNvPr id="66" name=""/>
           <p:cNvSpPr txBox="1"/>
           <p:nvPr/>
         </p:nvSpPr>
@@ -12685,7 +12846,7 @@
       </p:sp>
       <p:sp>
         <p:nvSpPr>
-          <p:cNvPr id="63" name=""/>
+          <p:cNvPr id="67" name=""/>
           <p:cNvSpPr/>
           <p:nvPr/>
         </p:nvSpPr>
@@ -12891,7 +13052,7 @@
       </p:sp>
       <p:sp>
         <p:nvSpPr>
-          <p:cNvPr id="64" name=""/>
+          <p:cNvPr id="68" name=""/>
           <p:cNvSpPr txBox="1"/>
           <p:nvPr/>
         </p:nvSpPr>
@@ -12934,7 +13095,7 @@
       </p:sp>
       <p:sp>
         <p:nvSpPr>
-          <p:cNvPr id="65" name=""/>
+          <p:cNvPr id="69" name=""/>
           <p:cNvSpPr/>
           <p:nvPr/>
         </p:nvSpPr>
@@ -13141,7 +13302,7 @@
       </p:sp>
       <p:sp>
         <p:nvSpPr>
-          <p:cNvPr id="66" name=""/>
+          <p:cNvPr id="70" name=""/>
           <p:cNvSpPr txBox="1"/>
           <p:nvPr/>
         </p:nvSpPr>
@@ -13194,7 +13355,7 @@
       </p:sp>
       <p:sp>
         <p:nvSpPr>
-          <p:cNvPr id="67" name=""/>
+          <p:cNvPr id="71" name=""/>
           <p:cNvSpPr/>
           <p:nvPr/>
         </p:nvSpPr>
@@ -13401,7 +13562,7 @@
       </p:sp>
       <p:sp>
         <p:nvSpPr>
-          <p:cNvPr id="68" name=""/>
+          <p:cNvPr id="72" name=""/>
           <p:cNvSpPr txBox="1"/>
           <p:nvPr/>
         </p:nvSpPr>
@@ -13464,7 +13625,7 @@
       </p:sp>
       <p:sp>
         <p:nvSpPr>
-          <p:cNvPr id="69" name=""/>
+          <p:cNvPr id="73" name=""/>
           <p:cNvSpPr txBox="1"/>
           <p:nvPr/>
         </p:nvSpPr>
@@ -13527,7 +13688,7 @@
       </p:sp>
       <p:sp>
         <p:nvSpPr>
-          <p:cNvPr id="70" name=""/>
+          <p:cNvPr id="74" name=""/>
           <p:cNvSpPr txBox="1"/>
           <p:nvPr/>
         </p:nvSpPr>
@@ -13570,7 +13731,7 @@
       </p:sp>
       <p:sp>
         <p:nvSpPr>
-          <p:cNvPr id="71" name=""/>
+          <p:cNvPr id="75" name=""/>
           <p:cNvSpPr/>
           <p:nvPr/>
         </p:nvSpPr>
@@ -13708,7 +13869,7 @@
       </p:sp>
       <p:sp>
         <p:nvSpPr>
-          <p:cNvPr id="72" name=""/>
+          <p:cNvPr id="76" name=""/>
           <p:cNvSpPr txBox="1"/>
           <p:nvPr/>
         </p:nvSpPr>
@@ -13761,7 +13922,7 @@
       </p:sp>
       <p:sp>
         <p:nvSpPr>
-          <p:cNvPr id="73" name=""/>
+          <p:cNvPr id="77" name=""/>
           <p:cNvSpPr txBox="1"/>
           <p:nvPr/>
         </p:nvSpPr>
@@ -13834,7 +13995,7 @@
       </p:grpSpPr>
       <p:sp>
         <p:nvSpPr>
-          <p:cNvPr id="74" name=""/>
+          <p:cNvPr id="78" name=""/>
           <p:cNvSpPr/>
           <p:nvPr/>
         </p:nvSpPr>
@@ -13892,7 +14053,7 @@
       </p:sp>
       <p:sp>
         <p:nvSpPr>
-          <p:cNvPr id="75" name=""/>
+          <p:cNvPr id="79" name=""/>
           <p:cNvSpPr/>
           <p:nvPr/>
         </p:nvSpPr>
@@ -13950,7 +14111,7 @@
       </p:sp>
       <p:sp>
         <p:nvSpPr>
-          <p:cNvPr id="76" name=""/>
+          <p:cNvPr id="80" name=""/>
           <p:cNvSpPr/>
           <p:nvPr/>
         </p:nvSpPr>
@@ -14008,7 +14169,7 @@
       </p:sp>
       <p:sp>
         <p:nvSpPr>
-          <p:cNvPr id="77" name=""/>
+          <p:cNvPr id="81" name=""/>
           <p:cNvSpPr/>
           <p:nvPr/>
         </p:nvSpPr>
@@ -14224,9 +14385,32 @@
           </a:p>
         </p:txBody>
       </p:sp>
+      <p:pic>
+        <p:nvPicPr>
+          <p:cNvPr id="82" name="" descr=""/>
+          <p:cNvPicPr/>
+          <p:nvPr/>
+        </p:nvPicPr>
+        <p:blipFill>
+          <a:blip r:embed="rId1"/>
+          <a:stretch/>
+        </p:blipFill>
+        <p:spPr>
+          <a:xfrm>
+            <a:off x="10515600" y="38160"/>
+            <a:ext cx="1142640" cy="1142640"/>
+          </a:xfrm>
+          <a:prstGeom prst="rect">
+            <a:avLst/>
+          </a:prstGeom>
+          <a:ln w="0">
+            <a:noFill/>
+          </a:ln>
+        </p:spPr>
+      </p:pic>
       <p:sp>
         <p:nvSpPr>
-          <p:cNvPr id="78" name=""/>
+          <p:cNvPr id="83" name=""/>
           <p:cNvSpPr txBox="1"/>
           <p:nvPr/>
         </p:nvSpPr>
@@ -14299,7 +14483,7 @@
       </p:sp>
       <p:sp>
         <p:nvSpPr>
-          <p:cNvPr id="79" name=""/>
+          <p:cNvPr id="84" name=""/>
           <p:cNvSpPr/>
           <p:nvPr/>
         </p:nvSpPr>
@@ -14505,7 +14689,7 @@
       </p:sp>
       <p:sp>
         <p:nvSpPr>
-          <p:cNvPr id="80" name=""/>
+          <p:cNvPr id="85" name=""/>
           <p:cNvSpPr txBox="1"/>
           <p:nvPr/>
         </p:nvSpPr>
@@ -14608,7 +14792,7 @@
       </p:sp>
       <p:sp>
         <p:nvSpPr>
-          <p:cNvPr id="81" name=""/>
+          <p:cNvPr id="86" name=""/>
           <p:cNvSpPr/>
           <p:nvPr/>
         </p:nvSpPr>
@@ -14815,7 +14999,7 @@
       </p:sp>
       <p:sp>
         <p:nvSpPr>
-          <p:cNvPr id="82" name=""/>
+          <p:cNvPr id="87" name=""/>
           <p:cNvSpPr txBox="1"/>
           <p:nvPr/>
         </p:nvSpPr>
@@ -14868,7 +15052,7 @@
       </p:sp>
       <p:sp>
         <p:nvSpPr>
-          <p:cNvPr id="83" name=""/>
+          <p:cNvPr id="88" name=""/>
           <p:cNvSpPr/>
           <p:nvPr/>
         </p:nvSpPr>
@@ -15074,7 +15258,7 @@
       </p:sp>
       <p:sp>
         <p:nvSpPr>
-          <p:cNvPr id="84" name=""/>
+          <p:cNvPr id="89" name=""/>
           <p:cNvSpPr txBox="1"/>
           <p:nvPr/>
         </p:nvSpPr>
@@ -15117,7 +15301,7 @@
       </p:sp>
       <p:sp>
         <p:nvSpPr>
-          <p:cNvPr id="85" name=""/>
+          <p:cNvPr id="90" name=""/>
           <p:cNvSpPr/>
           <p:nvPr/>
         </p:nvSpPr>
@@ -15324,7 +15508,7 @@
       </p:sp>
       <p:sp>
         <p:nvSpPr>
-          <p:cNvPr id="86" name=""/>
+          <p:cNvPr id="91" name=""/>
           <p:cNvSpPr txBox="1"/>
           <p:nvPr/>
         </p:nvSpPr>
@@ -15377,7 +15561,7 @@
       </p:sp>
       <p:sp>
         <p:nvSpPr>
-          <p:cNvPr id="87" name=""/>
+          <p:cNvPr id="92" name=""/>
           <p:cNvSpPr/>
           <p:nvPr/>
         </p:nvSpPr>
@@ -15583,7 +15767,7 @@
       </p:sp>
       <p:sp>
         <p:nvSpPr>
-          <p:cNvPr id="88" name=""/>
+          <p:cNvPr id="93" name=""/>
           <p:cNvSpPr txBox="1"/>
           <p:nvPr/>
         </p:nvSpPr>
@@ -15626,7 +15810,7 @@
       </p:sp>
       <p:sp>
         <p:nvSpPr>
-          <p:cNvPr id="89" name=""/>
+          <p:cNvPr id="94" name=""/>
           <p:cNvSpPr/>
           <p:nvPr/>
         </p:nvSpPr>
@@ -15833,7 +16017,7 @@
       </p:sp>
       <p:sp>
         <p:nvSpPr>
-          <p:cNvPr id="90" name=""/>
+          <p:cNvPr id="95" name=""/>
           <p:cNvSpPr txBox="1"/>
           <p:nvPr/>
         </p:nvSpPr>
@@ -15886,7 +16070,7 @@
       </p:sp>
       <p:sp>
         <p:nvSpPr>
-          <p:cNvPr id="91" name=""/>
+          <p:cNvPr id="96" name=""/>
           <p:cNvSpPr txBox="1"/>
           <p:nvPr/>
         </p:nvSpPr>
@@ -15929,7 +16113,7 @@
       </p:sp>
       <p:sp>
         <p:nvSpPr>
-          <p:cNvPr id="92" name=""/>
+          <p:cNvPr id="97" name=""/>
           <p:cNvSpPr/>
           <p:nvPr/>
         </p:nvSpPr>
@@ -16067,7 +16251,7 @@
       </p:sp>
       <p:sp>
         <p:nvSpPr>
-          <p:cNvPr id="93" name=""/>
+          <p:cNvPr id="98" name=""/>
           <p:cNvSpPr txBox="1"/>
           <p:nvPr/>
         </p:nvSpPr>
@@ -16120,7 +16304,7 @@
       </p:sp>
       <p:sp>
         <p:nvSpPr>
-          <p:cNvPr id="94" name=""/>
+          <p:cNvPr id="99" name=""/>
           <p:cNvSpPr txBox="1"/>
           <p:nvPr/>
         </p:nvSpPr>
@@ -16193,7 +16377,7 @@
       </p:grpSpPr>
       <p:sp>
         <p:nvSpPr>
-          <p:cNvPr id="95" name=""/>
+          <p:cNvPr id="100" name=""/>
           <p:cNvSpPr/>
           <p:nvPr/>
         </p:nvSpPr>
@@ -16251,7 +16435,7 @@
       </p:sp>
       <p:sp>
         <p:nvSpPr>
-          <p:cNvPr id="96" name=""/>
+          <p:cNvPr id="101" name=""/>
           <p:cNvSpPr/>
           <p:nvPr/>
         </p:nvSpPr>
@@ -16309,7 +16493,7 @@
       </p:sp>
       <p:sp>
         <p:nvSpPr>
-          <p:cNvPr id="97" name=""/>
+          <p:cNvPr id="102" name=""/>
           <p:cNvSpPr/>
           <p:nvPr/>
         </p:nvSpPr>
@@ -16367,7 +16551,7 @@
       </p:sp>
       <p:sp>
         <p:nvSpPr>
-          <p:cNvPr id="98" name=""/>
+          <p:cNvPr id="103" name=""/>
           <p:cNvSpPr/>
           <p:nvPr/>
         </p:nvSpPr>
@@ -16583,9 +16767,32 @@
           </a:p>
         </p:txBody>
       </p:sp>
+      <p:pic>
+        <p:nvPicPr>
+          <p:cNvPr id="104" name="" descr=""/>
+          <p:cNvPicPr/>
+          <p:nvPr/>
+        </p:nvPicPr>
+        <p:blipFill>
+          <a:blip r:embed="rId1"/>
+          <a:stretch/>
+        </p:blipFill>
+        <p:spPr>
+          <a:xfrm>
+            <a:off x="10515600" y="38160"/>
+            <a:ext cx="1142640" cy="1142640"/>
+          </a:xfrm>
+          <a:prstGeom prst="rect">
+            <a:avLst/>
+          </a:prstGeom>
+          <a:ln w="0">
+            <a:noFill/>
+          </a:ln>
+        </p:spPr>
+      </p:pic>
       <p:sp>
         <p:nvSpPr>
-          <p:cNvPr id="99" name=""/>
+          <p:cNvPr id="105" name=""/>
           <p:cNvSpPr/>
           <p:nvPr/>
         </p:nvSpPr>
@@ -16791,7 +16998,7 @@
       </p:sp>
       <p:sp>
         <p:nvSpPr>
-          <p:cNvPr id="100" name=""/>
+          <p:cNvPr id="106" name=""/>
           <p:cNvSpPr txBox="1"/>
           <p:nvPr/>
         </p:nvSpPr>
@@ -16854,7 +17061,7 @@
       </p:sp>
       <p:sp>
         <p:nvSpPr>
-          <p:cNvPr id="101" name=""/>
+          <p:cNvPr id="107" name=""/>
           <p:cNvSpPr txBox="1"/>
           <p:nvPr/>
         </p:nvSpPr>
@@ -16897,7 +17104,7 @@
       </p:sp>
       <p:sp>
         <p:nvSpPr>
-          <p:cNvPr id="102" name=""/>
+          <p:cNvPr id="108" name=""/>
           <p:cNvSpPr/>
           <p:nvPr/>
         </p:nvSpPr>
@@ -17103,7 +17310,7 @@
       </p:sp>
       <p:sp>
         <p:nvSpPr>
-          <p:cNvPr id="103" name=""/>
+          <p:cNvPr id="109" name=""/>
           <p:cNvSpPr txBox="1"/>
           <p:nvPr/>
         </p:nvSpPr>
@@ -17146,7 +17353,7 @@
       </p:sp>
       <p:sp>
         <p:nvSpPr>
-          <p:cNvPr id="104" name=""/>
+          <p:cNvPr id="110" name=""/>
           <p:cNvSpPr txBox="1"/>
           <p:nvPr/>
         </p:nvSpPr>
@@ -17189,7 +17396,7 @@
       </p:sp>
       <p:sp>
         <p:nvSpPr>
-          <p:cNvPr id="105" name=""/>
+          <p:cNvPr id="111" name=""/>
           <p:cNvSpPr/>
           <p:nvPr/>
         </p:nvSpPr>
@@ -17395,7 +17602,7 @@
       </p:sp>
       <p:sp>
         <p:nvSpPr>
-          <p:cNvPr id="106" name=""/>
+          <p:cNvPr id="112" name=""/>
           <p:cNvSpPr txBox="1"/>
           <p:nvPr/>
         </p:nvSpPr>
@@ -17446,324 +17653,6 @@
                 <a:ea typeface="NotoSansJP"/>
               </a:rPr>
               <a:t>）を生成</a:t>
-            </a:r>
-            <a:endParaRPr b="0" lang="en-US" sz="2170" spc="-1" strike="noStrike">
-              <a:solidFill>
-                <a:srgbClr val="000000"/>
-              </a:solidFill>
-              <a:latin typeface="Times New Roman"/>
-            </a:endParaRPr>
-          </a:p>
-        </p:txBody>
-      </p:sp>
-      <p:sp>
-        <p:nvSpPr>
-          <p:cNvPr id="107" name=""/>
-          <p:cNvSpPr txBox="1"/>
-          <p:nvPr/>
-        </p:nvSpPr>
-        <p:spPr>
-          <a:xfrm>
-            <a:off x="1085760" y="3486240"/>
-            <a:ext cx="4690080" cy="399600"/>
-          </a:xfrm>
-          <a:prstGeom prst="rect">
-            <a:avLst/>
-          </a:prstGeom>
-          <a:noFill/>
-          <a:ln w="0">
-            <a:noFill/>
-          </a:ln>
-        </p:spPr>
-        <p:txBody>
-          <a:bodyPr wrap="none" lIns="0" rIns="0" tIns="0" bIns="0" anchor="t">
-            <a:noAutofit/>
-          </a:bodyPr>
-          <a:p>
-            <a:r>
-              <a:rPr b="0" lang="zh-CN" sz="2170" spc="-1" strike="noStrike">
-                <a:solidFill>
-                  <a:srgbClr val="083a5e"/>
-                </a:solidFill>
-                <a:latin typeface="NotoSansJP"/>
-                <a:ea typeface="NotoSansJP"/>
-              </a:rPr>
-              <a:t>パラメータ共有</a:t>
-            </a:r>
-            <a:r>
-              <a:rPr b="0" lang="zh-CN" sz="2170" spc="-1" strike="noStrike">
-                <a:solidFill>
-                  <a:srgbClr val="111111"/>
-                </a:solidFill>
-                <a:latin typeface="NotoSansJP"/>
-                <a:ea typeface="NotoSansJP"/>
-              </a:rPr>
-              <a:t>の仕組みにより、少な</a:t>
-            </a:r>
-            <a:endParaRPr b="0" lang="en-US" sz="2170" spc="-1" strike="noStrike">
-              <a:solidFill>
-                <a:srgbClr val="000000"/>
-              </a:solidFill>
-              <a:latin typeface="Times New Roman"/>
-            </a:endParaRPr>
-          </a:p>
-        </p:txBody>
-      </p:sp>
-      <p:sp>
-        <p:nvSpPr>
-          <p:cNvPr id="108" name=""/>
-          <p:cNvSpPr txBox="1"/>
-          <p:nvPr/>
-        </p:nvSpPr>
-        <p:spPr>
-          <a:xfrm>
-            <a:off x="1085760" y="3895560"/>
-            <a:ext cx="3035160" cy="399600"/>
-          </a:xfrm>
-          <a:prstGeom prst="rect">
-            <a:avLst/>
-          </a:prstGeom>
-          <a:noFill/>
-          <a:ln w="0">
-            <a:noFill/>
-          </a:ln>
-        </p:spPr>
-        <p:txBody>
-          <a:bodyPr wrap="none" lIns="0" rIns="0" tIns="0" bIns="0" anchor="t">
-            <a:noAutofit/>
-          </a:bodyPr>
-          <a:p>
-            <a:r>
-              <a:rPr b="0" lang="zh-CN" sz="2170" spc="-1" strike="noStrike">
-                <a:solidFill>
-                  <a:srgbClr val="111111"/>
-                </a:solidFill>
-                <a:latin typeface="NotoSansJP"/>
-                <a:ea typeface="NotoSansJP"/>
-              </a:rPr>
-              <a:t>いパラメータで学習可能</a:t>
-            </a:r>
-            <a:endParaRPr b="0" lang="en-US" sz="2170" spc="-1" strike="noStrike">
-              <a:solidFill>
-                <a:srgbClr val="000000"/>
-              </a:solidFill>
-              <a:latin typeface="Times New Roman"/>
-            </a:endParaRPr>
-          </a:p>
-        </p:txBody>
-      </p:sp>
-      <p:sp>
-        <p:nvSpPr>
-          <p:cNvPr id="109" name=""/>
-          <p:cNvSpPr txBox="1"/>
-          <p:nvPr/>
-        </p:nvSpPr>
-        <p:spPr>
-          <a:xfrm>
-            <a:off x="533520" y="4876920"/>
-            <a:ext cx="5193360" cy="401040"/>
-          </a:xfrm>
-          <a:prstGeom prst="rect">
-            <a:avLst/>
-          </a:prstGeom>
-          <a:noFill/>
-          <a:ln w="0">
-            <a:noFill/>
-          </a:ln>
-        </p:spPr>
-        <p:txBody>
-          <a:bodyPr wrap="none" lIns="0" rIns="0" tIns="0" bIns="0" anchor="t">
-            <a:noAutofit/>
-          </a:bodyPr>
-          <a:p>
-            <a:r>
-              <a:rPr b="0" lang="zh-CN" sz="2170" spc="-1" strike="noStrike">
-                <a:solidFill>
-                  <a:srgbClr val="111111"/>
-                </a:solidFill>
-                <a:latin typeface="NotoSansJP"/>
-                <a:ea typeface="NotoSansJP"/>
-              </a:rPr>
-              <a:t>活性化関数には主に</a:t>
-            </a:r>
-            <a:r>
-              <a:rPr b="0" lang="en-US" sz="2170" spc="-1" strike="noStrike">
-                <a:solidFill>
-                  <a:srgbClr val="111111"/>
-                </a:solidFill>
-                <a:latin typeface="NotoSansJP"/>
-                <a:ea typeface="NotoSansJP"/>
-              </a:rPr>
-              <a:t>ReLU (Rectified Linear</a:t>
-            </a:r>
-            <a:endParaRPr b="0" lang="en-US" sz="2170" spc="-1" strike="noStrike">
-              <a:solidFill>
-                <a:srgbClr val="000000"/>
-              </a:solidFill>
-              <a:latin typeface="Times New Roman"/>
-            </a:endParaRPr>
-          </a:p>
-        </p:txBody>
-      </p:sp>
-      <p:sp>
-        <p:nvSpPr>
-          <p:cNvPr id="110" name=""/>
-          <p:cNvSpPr txBox="1"/>
-          <p:nvPr/>
-        </p:nvSpPr>
-        <p:spPr>
-          <a:xfrm>
-            <a:off x="533520" y="5295960"/>
-            <a:ext cx="2648160" cy="401040"/>
-          </a:xfrm>
-          <a:prstGeom prst="rect">
-            <a:avLst/>
-          </a:prstGeom>
-          <a:noFill/>
-          <a:ln w="0">
-            <a:noFill/>
-          </a:ln>
-        </p:spPr>
-        <p:txBody>
-          <a:bodyPr wrap="none" lIns="0" rIns="0" tIns="0" bIns="0" anchor="t">
-            <a:noAutofit/>
-          </a:bodyPr>
-          <a:p>
-            <a:r>
-              <a:rPr b="0" lang="en-US" sz="2170" spc="-1" strike="noStrike">
-                <a:solidFill>
-                  <a:srgbClr val="111111"/>
-                </a:solidFill>
-                <a:latin typeface="NotoSansJP"/>
-                <a:ea typeface="NotoSansJP"/>
-              </a:rPr>
-              <a:t>Unit) </a:t>
-            </a:r>
-            <a:r>
-              <a:rPr b="0" lang="zh-CN" sz="2170" spc="-1" strike="noStrike">
-                <a:solidFill>
-                  <a:srgbClr val="111111"/>
-                </a:solidFill>
-                <a:latin typeface="NotoSansJP"/>
-                <a:ea typeface="NotoSansJP"/>
-              </a:rPr>
-              <a:t>が使われます。</a:t>
-            </a:r>
-            <a:endParaRPr b="0" lang="en-US" sz="2170" spc="-1" strike="noStrike">
-              <a:solidFill>
-                <a:srgbClr val="000000"/>
-              </a:solidFill>
-              <a:latin typeface="Times New Roman"/>
-            </a:endParaRPr>
-          </a:p>
-        </p:txBody>
-      </p:sp>
-      <p:sp>
-        <p:nvSpPr>
-          <p:cNvPr id="111" name=""/>
-          <p:cNvSpPr txBox="1"/>
-          <p:nvPr/>
-        </p:nvSpPr>
-        <p:spPr>
-          <a:xfrm>
-            <a:off x="6229440" y="923760"/>
-            <a:ext cx="5135760" cy="401040"/>
-          </a:xfrm>
-          <a:prstGeom prst="rect">
-            <a:avLst/>
-          </a:prstGeom>
-          <a:noFill/>
-          <a:ln w="0">
-            <a:noFill/>
-          </a:ln>
-        </p:spPr>
-        <p:txBody>
-          <a:bodyPr wrap="none" lIns="0" rIns="0" tIns="0" bIns="0" anchor="t">
-            <a:noAutofit/>
-          </a:bodyPr>
-          <a:p>
-            <a:r>
-              <a:rPr b="0" lang="en-US" sz="2170" spc="-1" strike="noStrike">
-                <a:solidFill>
-                  <a:srgbClr val="111111"/>
-                </a:solidFill>
-                <a:latin typeface="NotoSansJP"/>
-                <a:ea typeface="NotoSansJP"/>
-              </a:rPr>
-              <a:t>[</a:t>
-            </a:r>
-            <a:r>
-              <a:rPr b="0" lang="zh-CN" sz="2170" spc="-1" strike="noStrike">
-                <a:solidFill>
-                  <a:srgbClr val="111111"/>
-                </a:solidFill>
-                <a:latin typeface="NotoSansJP"/>
-                <a:ea typeface="NotoSansJP"/>
-              </a:rPr>
-              <a:t>図</a:t>
-            </a:r>
-            <a:r>
-              <a:rPr b="0" lang="en-US" sz="2170" spc="-1" strike="noStrike">
-                <a:solidFill>
-                  <a:srgbClr val="111111"/>
-                </a:solidFill>
-                <a:latin typeface="NotoSansJP"/>
-                <a:ea typeface="NotoSansJP"/>
-              </a:rPr>
-              <a:t>: </a:t>
-            </a:r>
-            <a:r>
-              <a:rPr b="0" lang="zh-CN" sz="2170" spc="-1" strike="noStrike">
-                <a:solidFill>
-                  <a:srgbClr val="111111"/>
-                </a:solidFill>
-                <a:latin typeface="NotoSansJP"/>
-                <a:ea typeface="NotoSansJP"/>
-              </a:rPr>
-              <a:t>ここに畳み込み演算の図解を入れる</a:t>
-            </a:r>
-            <a:endParaRPr b="0" lang="en-US" sz="2170" spc="-1" strike="noStrike">
-              <a:solidFill>
-                <a:srgbClr val="000000"/>
-              </a:solidFill>
-              <a:latin typeface="Times New Roman"/>
-            </a:endParaRPr>
-          </a:p>
-        </p:txBody>
-      </p:sp>
-      <p:sp>
-        <p:nvSpPr>
-          <p:cNvPr id="112" name=""/>
-          <p:cNvSpPr txBox="1"/>
-          <p:nvPr/>
-        </p:nvSpPr>
-        <p:spPr>
-          <a:xfrm>
-            <a:off x="6229440" y="1343160"/>
-            <a:ext cx="1220040" cy="375120"/>
-          </a:xfrm>
-          <a:prstGeom prst="rect">
-            <a:avLst/>
-          </a:prstGeom>
-          <a:noFill/>
-          <a:ln w="0">
-            <a:noFill/>
-          </a:ln>
-        </p:spPr>
-        <p:txBody>
-          <a:bodyPr wrap="none" lIns="0" rIns="0" tIns="0" bIns="0" anchor="t">
-            <a:noAutofit/>
-          </a:bodyPr>
-          <a:p>
-            <a:r>
-              <a:rPr b="0" lang="en-US" sz="2170" spc="-1" strike="noStrike">
-                <a:solidFill>
-                  <a:srgbClr val="111111"/>
-                </a:solidFill>
-                <a:latin typeface="NotoSansJP"/>
-                <a:ea typeface="NotoSansJP"/>
-              </a:rPr>
-              <a:t>(Figure 4)]</a:t>
             </a:r>
             <a:endParaRPr b="0" lang="en-US" sz="2170" spc="-1" strike="noStrike">
               <a:solidFill>
@@ -17782,8 +17671,8 @@
         </p:nvSpPr>
         <p:spPr>
           <a:xfrm>
-            <a:off x="6457680" y="2171520"/>
-            <a:ext cx="4965840" cy="399600"/>
+            <a:off x="1085760" y="3486240"/>
+            <a:ext cx="4690080" cy="399600"/>
           </a:xfrm>
           <a:prstGeom prst="rect">
             <a:avLst/>
@@ -17801,12 +17690,22 @@
             <a:r>
               <a:rPr b="0" lang="zh-CN" sz="2170" spc="-1" strike="noStrike">
                 <a:solidFill>
-                  <a:srgbClr val="111111"/>
+                  <a:srgbClr val="083a5e"/>
                 </a:solidFill>
                 <a:latin typeface="NotoSansJP"/>
                 <a:ea typeface="NotoSansJP"/>
               </a:rPr>
-              <a:t>カーネルを適用し、特徴を抽出する様子</a:t>
+              <a:t>パラメータ共有</a:t>
+            </a:r>
+            <a:r>
+              <a:rPr b="0" lang="zh-CN" sz="2170" spc="-1" strike="noStrike">
+                <a:solidFill>
+                  <a:srgbClr val="111111"/>
+                </a:solidFill>
+                <a:latin typeface="NotoSansJP"/>
+                <a:ea typeface="NotoSansJP"/>
+              </a:rPr>
+              <a:t>の仕組みにより、少な</a:t>
             </a:r>
             <a:endParaRPr b="0" lang="en-US" sz="2170" spc="-1" strike="noStrike">
               <a:solidFill>
@@ -17820,6 +17719,314 @@
       <p:sp>
         <p:nvSpPr>
           <p:cNvPr id="114" name=""/>
+          <p:cNvSpPr txBox="1"/>
+          <p:nvPr/>
+        </p:nvSpPr>
+        <p:spPr>
+          <a:xfrm>
+            <a:off x="1085760" y="3895560"/>
+            <a:ext cx="3035160" cy="399600"/>
+          </a:xfrm>
+          <a:prstGeom prst="rect">
+            <a:avLst/>
+          </a:prstGeom>
+          <a:noFill/>
+          <a:ln w="0">
+            <a:noFill/>
+          </a:ln>
+        </p:spPr>
+        <p:txBody>
+          <a:bodyPr wrap="none" lIns="0" rIns="0" tIns="0" bIns="0" anchor="t">
+            <a:noAutofit/>
+          </a:bodyPr>
+          <a:p>
+            <a:r>
+              <a:rPr b="0" lang="zh-CN" sz="2170" spc="-1" strike="noStrike">
+                <a:solidFill>
+                  <a:srgbClr val="111111"/>
+                </a:solidFill>
+                <a:latin typeface="NotoSansJP"/>
+                <a:ea typeface="NotoSansJP"/>
+              </a:rPr>
+              <a:t>いパラメータで学習可能</a:t>
+            </a:r>
+            <a:endParaRPr b="0" lang="en-US" sz="2170" spc="-1" strike="noStrike">
+              <a:solidFill>
+                <a:srgbClr val="000000"/>
+              </a:solidFill>
+              <a:latin typeface="Times New Roman"/>
+            </a:endParaRPr>
+          </a:p>
+        </p:txBody>
+      </p:sp>
+      <p:sp>
+        <p:nvSpPr>
+          <p:cNvPr id="115" name=""/>
+          <p:cNvSpPr txBox="1"/>
+          <p:nvPr/>
+        </p:nvSpPr>
+        <p:spPr>
+          <a:xfrm>
+            <a:off x="533520" y="4876920"/>
+            <a:ext cx="5193360" cy="401040"/>
+          </a:xfrm>
+          <a:prstGeom prst="rect">
+            <a:avLst/>
+          </a:prstGeom>
+          <a:noFill/>
+          <a:ln w="0">
+            <a:noFill/>
+          </a:ln>
+        </p:spPr>
+        <p:txBody>
+          <a:bodyPr wrap="none" lIns="0" rIns="0" tIns="0" bIns="0" anchor="t">
+            <a:noAutofit/>
+          </a:bodyPr>
+          <a:p>
+            <a:r>
+              <a:rPr b="0" lang="zh-CN" sz="2170" spc="-1" strike="noStrike">
+                <a:solidFill>
+                  <a:srgbClr val="111111"/>
+                </a:solidFill>
+                <a:latin typeface="NotoSansJP"/>
+                <a:ea typeface="NotoSansJP"/>
+              </a:rPr>
+              <a:t>活性化関数には主に</a:t>
+            </a:r>
+            <a:r>
+              <a:rPr b="0" lang="en-US" sz="2170" spc="-1" strike="noStrike">
+                <a:solidFill>
+                  <a:srgbClr val="111111"/>
+                </a:solidFill>
+                <a:latin typeface="NotoSansJP"/>
+                <a:ea typeface="NotoSansJP"/>
+              </a:rPr>
+              <a:t>ReLU (Rectified Linear</a:t>
+            </a:r>
+            <a:endParaRPr b="0" lang="en-US" sz="2170" spc="-1" strike="noStrike">
+              <a:solidFill>
+                <a:srgbClr val="000000"/>
+              </a:solidFill>
+              <a:latin typeface="Times New Roman"/>
+            </a:endParaRPr>
+          </a:p>
+        </p:txBody>
+      </p:sp>
+      <p:sp>
+        <p:nvSpPr>
+          <p:cNvPr id="116" name=""/>
+          <p:cNvSpPr txBox="1"/>
+          <p:nvPr/>
+        </p:nvSpPr>
+        <p:spPr>
+          <a:xfrm>
+            <a:off x="533520" y="5295960"/>
+            <a:ext cx="2648160" cy="401040"/>
+          </a:xfrm>
+          <a:prstGeom prst="rect">
+            <a:avLst/>
+          </a:prstGeom>
+          <a:noFill/>
+          <a:ln w="0">
+            <a:noFill/>
+          </a:ln>
+        </p:spPr>
+        <p:txBody>
+          <a:bodyPr wrap="none" lIns="0" rIns="0" tIns="0" bIns="0" anchor="t">
+            <a:noAutofit/>
+          </a:bodyPr>
+          <a:p>
+            <a:r>
+              <a:rPr b="0" lang="en-US" sz="2170" spc="-1" strike="noStrike">
+                <a:solidFill>
+                  <a:srgbClr val="111111"/>
+                </a:solidFill>
+                <a:latin typeface="NotoSansJP"/>
+                <a:ea typeface="NotoSansJP"/>
+              </a:rPr>
+              <a:t>Unit) </a:t>
+            </a:r>
+            <a:r>
+              <a:rPr b="0" lang="zh-CN" sz="2170" spc="-1" strike="noStrike">
+                <a:solidFill>
+                  <a:srgbClr val="111111"/>
+                </a:solidFill>
+                <a:latin typeface="NotoSansJP"/>
+                <a:ea typeface="NotoSansJP"/>
+              </a:rPr>
+              <a:t>が使われます。</a:t>
+            </a:r>
+            <a:endParaRPr b="0" lang="en-US" sz="2170" spc="-1" strike="noStrike">
+              <a:solidFill>
+                <a:srgbClr val="000000"/>
+              </a:solidFill>
+              <a:latin typeface="Times New Roman"/>
+            </a:endParaRPr>
+          </a:p>
+        </p:txBody>
+      </p:sp>
+      <p:sp>
+        <p:nvSpPr>
+          <p:cNvPr id="117" name=""/>
+          <p:cNvSpPr txBox="1"/>
+          <p:nvPr/>
+        </p:nvSpPr>
+        <p:spPr>
+          <a:xfrm>
+            <a:off x="6229440" y="923760"/>
+            <a:ext cx="5135760" cy="401040"/>
+          </a:xfrm>
+          <a:prstGeom prst="rect">
+            <a:avLst/>
+          </a:prstGeom>
+          <a:noFill/>
+          <a:ln w="0">
+            <a:noFill/>
+          </a:ln>
+        </p:spPr>
+        <p:txBody>
+          <a:bodyPr wrap="none" lIns="0" rIns="0" tIns="0" bIns="0" anchor="t">
+            <a:noAutofit/>
+          </a:bodyPr>
+          <a:p>
+            <a:r>
+              <a:rPr b="0" lang="en-US" sz="2170" spc="-1" strike="noStrike">
+                <a:solidFill>
+                  <a:srgbClr val="111111"/>
+                </a:solidFill>
+                <a:latin typeface="NotoSansJP"/>
+                <a:ea typeface="NotoSansJP"/>
+              </a:rPr>
+              <a:t>[</a:t>
+            </a:r>
+            <a:r>
+              <a:rPr b="0" lang="zh-CN" sz="2170" spc="-1" strike="noStrike">
+                <a:solidFill>
+                  <a:srgbClr val="111111"/>
+                </a:solidFill>
+                <a:latin typeface="NotoSansJP"/>
+                <a:ea typeface="NotoSansJP"/>
+              </a:rPr>
+              <a:t>図</a:t>
+            </a:r>
+            <a:r>
+              <a:rPr b="0" lang="en-US" sz="2170" spc="-1" strike="noStrike">
+                <a:solidFill>
+                  <a:srgbClr val="111111"/>
+                </a:solidFill>
+                <a:latin typeface="NotoSansJP"/>
+                <a:ea typeface="NotoSansJP"/>
+              </a:rPr>
+              <a:t>: </a:t>
+            </a:r>
+            <a:r>
+              <a:rPr b="0" lang="zh-CN" sz="2170" spc="-1" strike="noStrike">
+                <a:solidFill>
+                  <a:srgbClr val="111111"/>
+                </a:solidFill>
+                <a:latin typeface="NotoSansJP"/>
+                <a:ea typeface="NotoSansJP"/>
+              </a:rPr>
+              <a:t>ここに畳み込み演算の図解を入れる</a:t>
+            </a:r>
+            <a:endParaRPr b="0" lang="en-US" sz="2170" spc="-1" strike="noStrike">
+              <a:solidFill>
+                <a:srgbClr val="000000"/>
+              </a:solidFill>
+              <a:latin typeface="Times New Roman"/>
+            </a:endParaRPr>
+          </a:p>
+        </p:txBody>
+      </p:sp>
+      <p:sp>
+        <p:nvSpPr>
+          <p:cNvPr id="118" name=""/>
+          <p:cNvSpPr txBox="1"/>
+          <p:nvPr/>
+        </p:nvSpPr>
+        <p:spPr>
+          <a:xfrm>
+            <a:off x="6229440" y="1343160"/>
+            <a:ext cx="1220040" cy="375120"/>
+          </a:xfrm>
+          <a:prstGeom prst="rect">
+            <a:avLst/>
+          </a:prstGeom>
+          <a:noFill/>
+          <a:ln w="0">
+            <a:noFill/>
+          </a:ln>
+        </p:spPr>
+        <p:txBody>
+          <a:bodyPr wrap="none" lIns="0" rIns="0" tIns="0" bIns="0" anchor="t">
+            <a:noAutofit/>
+          </a:bodyPr>
+          <a:p>
+            <a:r>
+              <a:rPr b="0" lang="en-US" sz="2170" spc="-1" strike="noStrike">
+                <a:solidFill>
+                  <a:srgbClr val="111111"/>
+                </a:solidFill>
+                <a:latin typeface="NotoSansJP"/>
+                <a:ea typeface="NotoSansJP"/>
+              </a:rPr>
+              <a:t>(Figure 4)]</a:t>
+            </a:r>
+            <a:endParaRPr b="0" lang="en-US" sz="2170" spc="-1" strike="noStrike">
+              <a:solidFill>
+                <a:srgbClr val="000000"/>
+              </a:solidFill>
+              <a:latin typeface="Times New Roman"/>
+            </a:endParaRPr>
+          </a:p>
+        </p:txBody>
+      </p:sp>
+      <p:sp>
+        <p:nvSpPr>
+          <p:cNvPr id="119" name=""/>
+          <p:cNvSpPr txBox="1"/>
+          <p:nvPr/>
+        </p:nvSpPr>
+        <p:spPr>
+          <a:xfrm>
+            <a:off x="6457680" y="2171520"/>
+            <a:ext cx="4965840" cy="399600"/>
+          </a:xfrm>
+          <a:prstGeom prst="rect">
+            <a:avLst/>
+          </a:prstGeom>
+          <a:noFill/>
+          <a:ln w="0">
+            <a:noFill/>
+          </a:ln>
+        </p:spPr>
+        <p:txBody>
+          <a:bodyPr wrap="none" lIns="0" rIns="0" tIns="0" bIns="0" anchor="t">
+            <a:noAutofit/>
+          </a:bodyPr>
+          <a:p>
+            <a:r>
+              <a:rPr b="0" lang="zh-CN" sz="2170" spc="-1" strike="noStrike">
+                <a:solidFill>
+                  <a:srgbClr val="111111"/>
+                </a:solidFill>
+                <a:latin typeface="NotoSansJP"/>
+                <a:ea typeface="NotoSansJP"/>
+              </a:rPr>
+              <a:t>カーネルを適用し、特徴を抽出する様子</a:t>
+            </a:r>
+            <a:endParaRPr b="0" lang="en-US" sz="2170" spc="-1" strike="noStrike">
+              <a:solidFill>
+                <a:srgbClr val="000000"/>
+              </a:solidFill>
+              <a:latin typeface="Times New Roman"/>
+            </a:endParaRPr>
+          </a:p>
+        </p:txBody>
+      </p:sp>
+      <p:sp>
+        <p:nvSpPr>
+          <p:cNvPr id="120" name=""/>
           <p:cNvSpPr/>
           <p:nvPr/>
         </p:nvSpPr>
@@ -17957,7 +18164,7 @@
       </p:sp>
       <p:sp>
         <p:nvSpPr>
-          <p:cNvPr id="115" name=""/>
+          <p:cNvPr id="121" name=""/>
           <p:cNvSpPr txBox="1"/>
           <p:nvPr/>
         </p:nvSpPr>
@@ -18020,7 +18227,7 @@
       </p:sp>
       <p:sp>
         <p:nvSpPr>
-          <p:cNvPr id="116" name=""/>
+          <p:cNvPr id="122" name=""/>
           <p:cNvSpPr txBox="1"/>
           <p:nvPr/>
         </p:nvSpPr>
@@ -18093,7 +18300,7 @@
       </p:grpSpPr>
       <p:sp>
         <p:nvSpPr>
-          <p:cNvPr id="117" name=""/>
+          <p:cNvPr id="123" name=""/>
           <p:cNvSpPr/>
           <p:nvPr/>
         </p:nvSpPr>
@@ -18151,7 +18358,7 @@
       </p:sp>
       <p:sp>
         <p:nvSpPr>
-          <p:cNvPr id="118" name=""/>
+          <p:cNvPr id="124" name=""/>
           <p:cNvSpPr/>
           <p:nvPr/>
         </p:nvSpPr>
@@ -18209,7 +18416,7 @@
       </p:sp>
       <p:sp>
         <p:nvSpPr>
-          <p:cNvPr id="119" name=""/>
+          <p:cNvPr id="125" name=""/>
           <p:cNvSpPr/>
           <p:nvPr/>
         </p:nvSpPr>
@@ -18267,7 +18474,7 @@
       </p:sp>
       <p:sp>
         <p:nvSpPr>
-          <p:cNvPr id="120" name=""/>
+          <p:cNvPr id="126" name=""/>
           <p:cNvSpPr/>
           <p:nvPr/>
         </p:nvSpPr>
@@ -18483,9 +18690,32 @@
           </a:p>
         </p:txBody>
       </p:sp>
+      <p:pic>
+        <p:nvPicPr>
+          <p:cNvPr id="127" name="" descr=""/>
+          <p:cNvPicPr/>
+          <p:nvPr/>
+        </p:nvPicPr>
+        <p:blipFill>
+          <a:blip r:embed="rId1"/>
+          <a:stretch/>
+        </p:blipFill>
+        <p:spPr>
+          <a:xfrm>
+            <a:off x="10515600" y="38160"/>
+            <a:ext cx="1142640" cy="1142640"/>
+          </a:xfrm>
+          <a:prstGeom prst="rect">
+            <a:avLst/>
+          </a:prstGeom>
+          <a:ln w="0">
+            <a:noFill/>
+          </a:ln>
+        </p:spPr>
+      </p:pic>
       <p:sp>
         <p:nvSpPr>
-          <p:cNvPr id="121" name=""/>
+          <p:cNvPr id="128" name=""/>
           <p:cNvSpPr txBox="1"/>
           <p:nvPr/>
         </p:nvSpPr>
@@ -18528,7 +18758,7 @@
       </p:sp>
       <p:sp>
         <p:nvSpPr>
-          <p:cNvPr id="122" name=""/>
+          <p:cNvPr id="129" name=""/>
           <p:cNvSpPr txBox="1"/>
           <p:nvPr/>
         </p:nvSpPr>
@@ -18571,7 +18801,7 @@
       </p:sp>
       <p:sp>
         <p:nvSpPr>
-          <p:cNvPr id="123" name=""/>
+          <p:cNvPr id="130" name=""/>
           <p:cNvSpPr/>
           <p:nvPr/>
         </p:nvSpPr>
@@ -18629,7 +18859,7 @@
       </p:sp>
       <p:sp>
         <p:nvSpPr>
-          <p:cNvPr id="124" name=""/>
+          <p:cNvPr id="131" name=""/>
           <p:cNvSpPr txBox="1"/>
           <p:nvPr/>
         </p:nvSpPr>
@@ -18672,7 +18902,7 @@
       </p:sp>
       <p:sp>
         <p:nvSpPr>
-          <p:cNvPr id="125" name=""/>
+          <p:cNvPr id="132" name=""/>
           <p:cNvSpPr txBox="1"/>
           <p:nvPr/>
         </p:nvSpPr>
@@ -18715,7 +18945,7 @@
       </p:sp>
       <p:sp>
         <p:nvSpPr>
-          <p:cNvPr id="126" name=""/>
+          <p:cNvPr id="133" name=""/>
           <p:cNvSpPr/>
           <p:nvPr/>
         </p:nvSpPr>
@@ -18921,7 +19151,7 @@
       </p:sp>
       <p:sp>
         <p:nvSpPr>
-          <p:cNvPr id="127" name=""/>
+          <p:cNvPr id="134" name=""/>
           <p:cNvSpPr txBox="1"/>
           <p:nvPr/>
         </p:nvSpPr>
@@ -18964,7 +19194,7 @@
       </p:sp>
       <p:sp>
         <p:nvSpPr>
-          <p:cNvPr id="128" name=""/>
+          <p:cNvPr id="135" name=""/>
           <p:cNvSpPr/>
           <p:nvPr/>
         </p:nvSpPr>
@@ -19170,7 +19400,7 @@
       </p:sp>
       <p:sp>
         <p:nvSpPr>
-          <p:cNvPr id="129" name=""/>
+          <p:cNvPr id="136" name=""/>
           <p:cNvSpPr txBox="1"/>
           <p:nvPr/>
         </p:nvSpPr>
@@ -19273,7 +19503,7 @@
       </p:sp>
       <p:sp>
         <p:nvSpPr>
-          <p:cNvPr id="130" name=""/>
+          <p:cNvPr id="137" name=""/>
           <p:cNvSpPr/>
           <p:nvPr/>
         </p:nvSpPr>
@@ -19479,7 +19709,7 @@
       </p:sp>
       <p:sp>
         <p:nvSpPr>
-          <p:cNvPr id="131" name=""/>
+          <p:cNvPr id="138" name=""/>
           <p:cNvSpPr txBox="1"/>
           <p:nvPr/>
         </p:nvSpPr>
@@ -19572,7 +19802,7 @@
       </p:sp>
       <p:sp>
         <p:nvSpPr>
-          <p:cNvPr id="132" name=""/>
+          <p:cNvPr id="139" name=""/>
           <p:cNvSpPr/>
           <p:nvPr/>
         </p:nvSpPr>
@@ -19778,7 +20008,7 @@
       </p:sp>
       <p:sp>
         <p:nvSpPr>
-          <p:cNvPr id="133" name=""/>
+          <p:cNvPr id="140" name=""/>
           <p:cNvSpPr txBox="1"/>
           <p:nvPr/>
         </p:nvSpPr>
@@ -19831,7 +20061,7 @@
       </p:sp>
       <p:sp>
         <p:nvSpPr>
-          <p:cNvPr id="134" name=""/>
+          <p:cNvPr id="141" name=""/>
           <p:cNvSpPr txBox="1"/>
           <p:nvPr/>
         </p:nvSpPr>
@@ -19914,7 +20144,7 @@
       </p:sp>
       <p:sp>
         <p:nvSpPr>
-          <p:cNvPr id="135" name=""/>
+          <p:cNvPr id="142" name=""/>
           <p:cNvSpPr txBox="1"/>
           <p:nvPr/>
         </p:nvSpPr>
@@ -19977,7 +20207,7 @@
       </p:sp>
       <p:sp>
         <p:nvSpPr>
-          <p:cNvPr id="136" name=""/>
+          <p:cNvPr id="143" name=""/>
           <p:cNvSpPr/>
           <p:nvPr/>
         </p:nvSpPr>
@@ -20115,7 +20345,7 @@
       </p:sp>
       <p:sp>
         <p:nvSpPr>
-          <p:cNvPr id="137" name=""/>
+          <p:cNvPr id="144" name=""/>
           <p:cNvSpPr txBox="1"/>
           <p:nvPr/>
         </p:nvSpPr>
@@ -20178,7 +20408,7 @@
       </p:sp>
       <p:sp>
         <p:nvSpPr>
-          <p:cNvPr id="138" name=""/>
+          <p:cNvPr id="145" name=""/>
           <p:cNvSpPr txBox="1"/>
           <p:nvPr/>
         </p:nvSpPr>
@@ -20221,7 +20451,7 @@
       </p:sp>
       <p:sp>
         <p:nvSpPr>
-          <p:cNvPr id="139" name=""/>
+          <p:cNvPr id="146" name=""/>
           <p:cNvSpPr txBox="1"/>
           <p:nvPr/>
         </p:nvSpPr>
@@ -20264,7 +20494,7 @@
       </p:sp>
       <p:sp>
         <p:nvSpPr>
-          <p:cNvPr id="140" name=""/>
+          <p:cNvPr id="147" name=""/>
           <p:cNvSpPr txBox="1"/>
           <p:nvPr/>
         </p:nvSpPr>
@@ -20307,7 +20537,7 @@
       </p:sp>
       <p:sp>
         <p:nvSpPr>
-          <p:cNvPr id="141" name=""/>
+          <p:cNvPr id="148" name=""/>
           <p:cNvSpPr txBox="1"/>
           <p:nvPr/>
         </p:nvSpPr>
@@ -20350,7 +20580,7 @@
       </p:sp>
       <p:sp>
         <p:nvSpPr>
-          <p:cNvPr id="142" name=""/>
+          <p:cNvPr id="149" name=""/>
           <p:cNvSpPr txBox="1"/>
           <p:nvPr/>
         </p:nvSpPr>
@@ -20423,7 +20653,7 @@
       </p:grpSpPr>
       <p:sp>
         <p:nvSpPr>
-          <p:cNvPr id="143" name=""/>
+          <p:cNvPr id="150" name=""/>
           <p:cNvSpPr/>
           <p:nvPr/>
         </p:nvSpPr>
@@ -20481,7 +20711,7 @@
       </p:sp>
       <p:sp>
         <p:nvSpPr>
-          <p:cNvPr id="144" name=""/>
+          <p:cNvPr id="151" name=""/>
           <p:cNvSpPr/>
           <p:nvPr/>
         </p:nvSpPr>
@@ -20539,7 +20769,7 @@
       </p:sp>
       <p:sp>
         <p:nvSpPr>
-          <p:cNvPr id="145" name=""/>
+          <p:cNvPr id="152" name=""/>
           <p:cNvSpPr/>
           <p:nvPr/>
         </p:nvSpPr>
@@ -20597,7 +20827,7 @@
       </p:sp>
       <p:sp>
         <p:nvSpPr>
-          <p:cNvPr id="146" name=""/>
+          <p:cNvPr id="153" name=""/>
           <p:cNvSpPr/>
           <p:nvPr/>
         </p:nvSpPr>
@@ -20813,9 +21043,32 @@
           </a:p>
         </p:txBody>
       </p:sp>
+      <p:pic>
+        <p:nvPicPr>
+          <p:cNvPr id="154" name="" descr=""/>
+          <p:cNvPicPr/>
+          <p:nvPr/>
+        </p:nvPicPr>
+        <p:blipFill>
+          <a:blip r:embed="rId1"/>
+          <a:stretch/>
+        </p:blipFill>
+        <p:spPr>
+          <a:xfrm>
+            <a:off x="10515600" y="38160"/>
+            <a:ext cx="1142640" cy="1142640"/>
+          </a:xfrm>
+          <a:prstGeom prst="rect">
+            <a:avLst/>
+          </a:prstGeom>
+          <a:ln w="0">
+            <a:noFill/>
+          </a:ln>
+        </p:spPr>
+      </p:pic>
       <p:sp>
         <p:nvSpPr>
-          <p:cNvPr id="147" name=""/>
+          <p:cNvPr id="155" name=""/>
           <p:cNvSpPr/>
           <p:nvPr/>
         </p:nvSpPr>
@@ -21021,7 +21274,7 @@
       </p:sp>
       <p:sp>
         <p:nvSpPr>
-          <p:cNvPr id="148" name=""/>
+          <p:cNvPr id="156" name=""/>
           <p:cNvSpPr txBox="1"/>
           <p:nvPr/>
         </p:nvSpPr>
@@ -21064,7 +21317,7 @@
       </p:sp>
       <p:sp>
         <p:nvSpPr>
-          <p:cNvPr id="149" name=""/>
+          <p:cNvPr id="157" name=""/>
           <p:cNvSpPr/>
           <p:nvPr/>
         </p:nvSpPr>
@@ -21271,7 +21524,7 @@
       </p:sp>
       <p:sp>
         <p:nvSpPr>
-          <p:cNvPr id="150" name=""/>
+          <p:cNvPr id="158" name=""/>
           <p:cNvSpPr txBox="1"/>
           <p:nvPr/>
         </p:nvSpPr>
@@ -21344,7 +21597,7 @@
       </p:sp>
       <p:sp>
         <p:nvSpPr>
-          <p:cNvPr id="151" name=""/>
+          <p:cNvPr id="159" name=""/>
           <p:cNvSpPr/>
           <p:nvPr/>
         </p:nvSpPr>
@@ -21551,7 +21804,7 @@
       </p:sp>
       <p:sp>
         <p:nvSpPr>
-          <p:cNvPr id="152" name=""/>
+          <p:cNvPr id="160" name=""/>
           <p:cNvSpPr txBox="1"/>
           <p:nvPr/>
         </p:nvSpPr>
@@ -21594,7 +21847,7 @@
       </p:sp>
       <p:sp>
         <p:nvSpPr>
-          <p:cNvPr id="153" name=""/>
+          <p:cNvPr id="161" name=""/>
           <p:cNvSpPr/>
           <p:nvPr/>
         </p:nvSpPr>
@@ -21800,7 +22053,7 @@
       </p:sp>
       <p:sp>
         <p:nvSpPr>
-          <p:cNvPr id="154" name=""/>
+          <p:cNvPr id="162" name=""/>
           <p:cNvSpPr txBox="1"/>
           <p:nvPr/>
         </p:nvSpPr>
@@ -21843,7 +22096,7 @@
       </p:sp>
       <p:sp>
         <p:nvSpPr>
-          <p:cNvPr id="155" name=""/>
+          <p:cNvPr id="163" name=""/>
           <p:cNvSpPr/>
           <p:nvPr/>
         </p:nvSpPr>
@@ -22050,7 +22303,7 @@
       </p:sp>
       <p:sp>
         <p:nvSpPr>
-          <p:cNvPr id="156" name=""/>
+          <p:cNvPr id="164" name=""/>
           <p:cNvSpPr txBox="1"/>
           <p:nvPr/>
         </p:nvSpPr>
@@ -22093,7 +22346,7 @@
       </p:sp>
       <p:sp>
         <p:nvSpPr>
-          <p:cNvPr id="157" name=""/>
+          <p:cNvPr id="165" name=""/>
           <p:cNvSpPr/>
           <p:nvPr/>
         </p:nvSpPr>
@@ -22300,7 +22553,7 @@
       </p:sp>
       <p:sp>
         <p:nvSpPr>
-          <p:cNvPr id="158" name=""/>
+          <p:cNvPr id="166" name=""/>
           <p:cNvSpPr txBox="1"/>
           <p:nvPr/>
         </p:nvSpPr>
@@ -22343,7 +22596,7 @@
       </p:sp>
       <p:sp>
         <p:nvSpPr>
-          <p:cNvPr id="159" name=""/>
+          <p:cNvPr id="167" name=""/>
           <p:cNvSpPr txBox="1"/>
           <p:nvPr/>
         </p:nvSpPr>
@@ -22386,7 +22639,7 @@
       </p:sp>
       <p:sp>
         <p:nvSpPr>
-          <p:cNvPr id="160" name=""/>
+          <p:cNvPr id="168" name=""/>
           <p:cNvSpPr txBox="1"/>
           <p:nvPr/>
         </p:nvSpPr>
@@ -22429,7 +22682,7 @@
       </p:sp>
       <p:sp>
         <p:nvSpPr>
-          <p:cNvPr id="161" name=""/>
+          <p:cNvPr id="169" name=""/>
           <p:cNvSpPr/>
           <p:nvPr/>
         </p:nvSpPr>
@@ -22567,7 +22820,7 @@
       </p:sp>
       <p:sp>
         <p:nvSpPr>
-          <p:cNvPr id="162" name=""/>
+          <p:cNvPr id="170" name=""/>
           <p:cNvSpPr txBox="1"/>
           <p:nvPr/>
         </p:nvSpPr>
@@ -22630,7 +22883,7 @@
       </p:sp>
       <p:sp>
         <p:nvSpPr>
-          <p:cNvPr id="163" name=""/>
+          <p:cNvPr id="171" name=""/>
           <p:cNvSpPr txBox="1"/>
           <p:nvPr/>
         </p:nvSpPr>
@@ -22703,7 +22956,7 @@
       </p:grpSpPr>
       <p:sp>
         <p:nvSpPr>
-          <p:cNvPr id="164" name=""/>
+          <p:cNvPr id="172" name=""/>
           <p:cNvSpPr/>
           <p:nvPr/>
         </p:nvSpPr>
@@ -22761,7 +23014,7 @@
       </p:sp>
       <p:sp>
         <p:nvSpPr>
-          <p:cNvPr id="165" name=""/>
+          <p:cNvPr id="173" name=""/>
           <p:cNvSpPr/>
           <p:nvPr/>
         </p:nvSpPr>
@@ -22819,7 +23072,7 @@
       </p:sp>
       <p:sp>
         <p:nvSpPr>
-          <p:cNvPr id="166" name=""/>
+          <p:cNvPr id="174" name=""/>
           <p:cNvSpPr/>
           <p:nvPr/>
         </p:nvSpPr>
@@ -22877,7 +23130,7 @@
       </p:sp>
       <p:sp>
         <p:nvSpPr>
-          <p:cNvPr id="167" name=""/>
+          <p:cNvPr id="175" name=""/>
           <p:cNvSpPr/>
           <p:nvPr/>
         </p:nvSpPr>
@@ -23093,9 +23346,32 @@
           </a:p>
         </p:txBody>
       </p:sp>
+      <p:pic>
+        <p:nvPicPr>
+          <p:cNvPr id="176" name="" descr=""/>
+          <p:cNvPicPr/>
+          <p:nvPr/>
+        </p:nvPicPr>
+        <p:blipFill>
+          <a:blip r:embed="rId1"/>
+          <a:stretch/>
+        </p:blipFill>
+        <p:spPr>
+          <a:xfrm>
+            <a:off x="10515600" y="38160"/>
+            <a:ext cx="1142640" cy="1142640"/>
+          </a:xfrm>
+          <a:prstGeom prst="rect">
+            <a:avLst/>
+          </a:prstGeom>
+          <a:ln w="0">
+            <a:noFill/>
+          </a:ln>
+        </p:spPr>
+      </p:pic>
       <p:sp>
         <p:nvSpPr>
-          <p:cNvPr id="168" name=""/>
+          <p:cNvPr id="177" name=""/>
           <p:cNvSpPr/>
           <p:nvPr/>
         </p:nvSpPr>
@@ -23301,7 +23577,7 @@
       </p:sp>
       <p:sp>
         <p:nvSpPr>
-          <p:cNvPr id="169" name=""/>
+          <p:cNvPr id="178" name=""/>
           <p:cNvSpPr txBox="1"/>
           <p:nvPr/>
         </p:nvSpPr>
@@ -23344,7 +23620,7 @@
       </p:sp>
       <p:sp>
         <p:nvSpPr>
-          <p:cNvPr id="170" name=""/>
+          <p:cNvPr id="179" name=""/>
           <p:cNvSpPr/>
           <p:nvPr/>
         </p:nvSpPr>
@@ -23551,7 +23827,7 @@
       </p:sp>
       <p:sp>
         <p:nvSpPr>
-          <p:cNvPr id="171" name=""/>
+          <p:cNvPr id="180" name=""/>
           <p:cNvSpPr txBox="1"/>
           <p:nvPr/>
         </p:nvSpPr>
@@ -23594,7 +23870,7 @@
       </p:sp>
       <p:sp>
         <p:nvSpPr>
-          <p:cNvPr id="172" name=""/>
+          <p:cNvPr id="181" name=""/>
           <p:cNvSpPr/>
           <p:nvPr/>
         </p:nvSpPr>
@@ -23801,7 +24077,7 @@
       </p:sp>
       <p:sp>
         <p:nvSpPr>
-          <p:cNvPr id="173" name=""/>
+          <p:cNvPr id="182" name=""/>
           <p:cNvSpPr txBox="1"/>
           <p:nvPr/>
         </p:nvSpPr>
@@ -23844,7 +24120,7 @@
       </p:sp>
       <p:sp>
         <p:nvSpPr>
-          <p:cNvPr id="174" name=""/>
+          <p:cNvPr id="183" name=""/>
           <p:cNvSpPr/>
           <p:nvPr/>
         </p:nvSpPr>
@@ -24050,7 +24326,7 @@
       </p:sp>
       <p:sp>
         <p:nvSpPr>
-          <p:cNvPr id="175" name=""/>
+          <p:cNvPr id="184" name=""/>
           <p:cNvSpPr txBox="1"/>
           <p:nvPr/>
         </p:nvSpPr>
@@ -24093,7 +24369,7 @@
       </p:sp>
       <p:sp>
         <p:nvSpPr>
-          <p:cNvPr id="176" name=""/>
+          <p:cNvPr id="185" name=""/>
           <p:cNvSpPr/>
           <p:nvPr/>
         </p:nvSpPr>
@@ -24300,7 +24576,7 @@
       </p:sp>
       <p:sp>
         <p:nvSpPr>
-          <p:cNvPr id="177" name=""/>
+          <p:cNvPr id="186" name=""/>
           <p:cNvSpPr txBox="1"/>
           <p:nvPr/>
         </p:nvSpPr>
@@ -24363,7 +24639,7 @@
       </p:sp>
       <p:sp>
         <p:nvSpPr>
-          <p:cNvPr id="178" name=""/>
+          <p:cNvPr id="187" name=""/>
           <p:cNvSpPr txBox="1"/>
           <p:nvPr/>
         </p:nvSpPr>
@@ -24406,7 +24682,7 @@
       </p:sp>
       <p:sp>
         <p:nvSpPr>
-          <p:cNvPr id="179" name=""/>
+          <p:cNvPr id="188" name=""/>
           <p:cNvSpPr txBox="1"/>
           <p:nvPr/>
         </p:nvSpPr>
@@ -24509,7 +24785,7 @@
       </p:sp>
       <p:sp>
         <p:nvSpPr>
-          <p:cNvPr id="180" name=""/>
+          <p:cNvPr id="189" name=""/>
           <p:cNvSpPr/>
           <p:nvPr/>
         </p:nvSpPr>
@@ -24647,7 +24923,7 @@
       </p:sp>
       <p:sp>
         <p:nvSpPr>
-          <p:cNvPr id="181" name=""/>
+          <p:cNvPr id="190" name=""/>
           <p:cNvSpPr txBox="1"/>
           <p:nvPr/>
         </p:nvSpPr>
@@ -24710,7 +24986,7 @@
       </p:sp>
       <p:sp>
         <p:nvSpPr>
-          <p:cNvPr id="182" name=""/>
+          <p:cNvPr id="191" name=""/>
           <p:cNvSpPr txBox="1"/>
           <p:nvPr/>
         </p:nvSpPr>
